--- a/slides/toto-final-project.pptx
+++ b/slides/toto-final-project.pptx
@@ -21,7 +21,7 @@
     <p:sldId id="269" r:id="rId20"/>
     <p:sldId id="270" r:id="rId21"/>
   </p:sldIdLst>
-  <p:sldSz cx="9144000" cy="6858000" type="screen4x3"/>
+  <p:sldSz cx="12191695" cy="6858000" type="screen4x3"/>
   <p:notesSz cx="6858000" cy="9144000"/>
   <p:defaultTextStyle>
     <a:defPPr>
@@ -3104,20 +3104,126 @@
       <p:grpSpPr/>
       <p:sp>
         <p:nvSpPr>
-          <p:cNvPr id="2" name="Title 1"/>
-          <p:cNvSpPr>
-            <a:spLocks noGrp="1"/>
-          </p:cNvSpPr>
-          <p:nvPr>
-            <p:ph type="ctrTitle"/>
-          </p:nvPr>
-        </p:nvSpPr>
-        <p:spPr/>
-        <p:txBody>
-          <a:bodyPr/>
-          <a:lstStyle/>
-          <a:p>
-            <a:r>
+          <p:cNvPr id="2" name="Rectangle 1"/>
+          <p:cNvSpPr/>
+          <p:nvPr/>
+        </p:nvSpPr>
+        <p:spPr>
+          <a:xfrm>
+            <a:off x="0" y="0"/>
+            <a:ext cx="12191695" cy="6858000"/>
+          </a:xfrm>
+          <a:prstGeom prst="rect">
+            <a:avLst/>
+          </a:prstGeom>
+          <a:solidFill>
+            <a:srgbClr val="0F172A"/>
+          </a:solidFill>
+          <a:ln>
+            <a:noFill/>
+          </a:ln>
+          <a:effectLst/>
+        </p:spPr>
+        <p:style>
+          <a:lnRef idx="1">
+            <a:schemeClr val="accent1"/>
+          </a:lnRef>
+          <a:fillRef idx="3">
+            <a:schemeClr val="accent1"/>
+          </a:fillRef>
+          <a:effectRef idx="2">
+            <a:schemeClr val="accent1"/>
+          </a:effectRef>
+          <a:fontRef idx="minor">
+            <a:schemeClr val="lt1"/>
+          </a:fontRef>
+        </p:style>
+        <p:txBody>
+          <a:bodyPr rtlCol="0" anchor="ctr"/>
+          <a:lstStyle/>
+          <a:p>
+            <a:pPr algn="ctr"/>
+          </a:p>
+        </p:txBody>
+      </p:sp>
+      <p:sp>
+        <p:nvSpPr>
+          <p:cNvPr id="3" name="Rectangle 2"/>
+          <p:cNvSpPr/>
+          <p:nvPr/>
+        </p:nvSpPr>
+        <p:spPr>
+          <a:xfrm>
+            <a:off x="0" y="0"/>
+            <a:ext cx="137160" cy="6858000"/>
+          </a:xfrm>
+          <a:prstGeom prst="rect">
+            <a:avLst/>
+          </a:prstGeom>
+          <a:solidFill>
+            <a:srgbClr val="2563EB"/>
+          </a:solidFill>
+          <a:ln>
+            <a:noFill/>
+          </a:ln>
+          <a:effectLst/>
+        </p:spPr>
+        <p:style>
+          <a:lnRef idx="1">
+            <a:schemeClr val="accent1"/>
+          </a:lnRef>
+          <a:fillRef idx="3">
+            <a:schemeClr val="accent1"/>
+          </a:fillRef>
+          <a:effectRef idx="2">
+            <a:schemeClr val="accent1"/>
+          </a:effectRef>
+          <a:fontRef idx="minor">
+            <a:schemeClr val="lt1"/>
+          </a:fontRef>
+        </p:style>
+        <p:txBody>
+          <a:bodyPr rtlCol="0" anchor="ctr"/>
+          <a:lstStyle/>
+          <a:p>
+            <a:pPr algn="ctr"/>
+          </a:p>
+        </p:txBody>
+      </p:sp>
+      <p:sp>
+        <p:nvSpPr>
+          <p:cNvPr id="4" name="TextBox 3"/>
+          <p:cNvSpPr txBox="1"/>
+          <p:nvPr/>
+        </p:nvSpPr>
+        <p:spPr>
+          <a:xfrm>
+            <a:off x="914400" y="2103120"/>
+            <a:ext cx="10332720" cy="1280160"/>
+          </a:xfrm>
+          <a:prstGeom prst="rect">
+            <a:avLst/>
+          </a:prstGeom>
+          <a:noFill/>
+        </p:spPr>
+        <p:txBody>
+          <a:bodyPr wrap="square">
+            <a:spAutoFit/>
+          </a:bodyPr>
+          <a:lstStyle/>
+          <a:p>
+            <a:pPr algn="l">
+              <a:lnSpc>
+                <a:spcPct val="115000"/>
+              </a:lnSpc>
+            </a:pPr>
+            <a:r>
+              <a:rPr sz="4000" b="1">
+                <a:solidFill>
+                  <a:srgbClr val="FFFFFF"/>
+                </a:solidFill>
+                <a:latin typeface="Calibri"/>
+              </a:rPr>
               <a:t>Toto — Industry-Simulated AI Product Workflow</a:t>
             </a:r>
           </a:p>
@@ -3125,21 +3231,156 @@
       </p:sp>
       <p:sp>
         <p:nvSpPr>
-          <p:cNvPr id="3" name="Subtitle 2"/>
-          <p:cNvSpPr>
-            <a:spLocks noGrp="1"/>
-          </p:cNvSpPr>
-          <p:nvPr>
-            <p:ph type="subTitle" idx="1"/>
-          </p:nvPr>
-        </p:nvSpPr>
-        <p:spPr/>
-        <p:txBody>
-          <a:bodyPr/>
-          <a:lstStyle/>
-          <a:p>
-            <a:r>
-              <a:t>Generated locally</a:t>
+          <p:cNvPr id="5" name="TextBox 4"/>
+          <p:cNvSpPr txBox="1"/>
+          <p:nvPr/>
+        </p:nvSpPr>
+        <p:spPr>
+          <a:xfrm>
+            <a:off x="914400" y="3383280"/>
+            <a:ext cx="10332720" cy="548640"/>
+          </a:xfrm>
+          <a:prstGeom prst="rect">
+            <a:avLst/>
+          </a:prstGeom>
+          <a:noFill/>
+        </p:spPr>
+        <p:txBody>
+          <a:bodyPr wrap="square">
+            <a:spAutoFit/>
+          </a:bodyPr>
+          <a:lstStyle/>
+          <a:p>
+            <a:pPr algn="l">
+              <a:lnSpc>
+                <a:spcPct val="115000"/>
+              </a:lnSpc>
+            </a:pPr>
+            <a:r>
+              <a:rPr sz="2000" b="0">
+                <a:solidFill>
+                  <a:srgbClr val="F97316"/>
+                </a:solidFill>
+                <a:latin typeface="Calibri"/>
+              </a:rPr>
+              <a:t>A Two-Crew CrewAI System for Hotel Booking Cancellation Prediction</a:t>
+            </a:r>
+          </a:p>
+        </p:txBody>
+      </p:sp>
+      <p:sp>
+        <p:nvSpPr>
+          <p:cNvPr id="6" name="TextBox 5"/>
+          <p:cNvSpPr txBox="1"/>
+          <p:nvPr/>
+        </p:nvSpPr>
+        <p:spPr>
+          <a:xfrm>
+            <a:off x="914400" y="4114800"/>
+            <a:ext cx="10332720" cy="548640"/>
+          </a:xfrm>
+          <a:prstGeom prst="rect">
+            <a:avLst/>
+          </a:prstGeom>
+          <a:noFill/>
+        </p:spPr>
+        <p:txBody>
+          <a:bodyPr wrap="square">
+            <a:spAutoFit/>
+          </a:bodyPr>
+          <a:lstStyle/>
+          <a:p>
+            <a:pPr algn="l">
+              <a:lnSpc>
+                <a:spcPct val="115000"/>
+              </a:lnSpc>
+            </a:pPr>
+            <a:r>
+              <a:rPr sz="1600" b="0">
+                <a:solidFill>
+                  <a:srgbClr val="CBD5E1"/>
+                </a:solidFill>
+                <a:latin typeface="Calibri"/>
+              </a:rPr>
+              <a:t>Final Project — AI Development &amp; Collaboration Course</a:t>
+            </a:r>
+          </a:p>
+        </p:txBody>
+      </p:sp>
+      <p:sp>
+        <p:nvSpPr>
+          <p:cNvPr id="7" name="TextBox 6"/>
+          <p:cNvSpPr txBox="1"/>
+          <p:nvPr/>
+        </p:nvSpPr>
+        <p:spPr>
+          <a:xfrm>
+            <a:off x="914400" y="4526280"/>
+            <a:ext cx="10332720" cy="457200"/>
+          </a:xfrm>
+          <a:prstGeom prst="rect">
+            <a:avLst/>
+          </a:prstGeom>
+          <a:noFill/>
+        </p:spPr>
+        <p:txBody>
+          <a:bodyPr wrap="square">
+            <a:spAutoFit/>
+          </a:bodyPr>
+          <a:lstStyle/>
+          <a:p>
+            <a:pPr algn="l">
+              <a:lnSpc>
+                <a:spcPct val="115000"/>
+              </a:lnSpc>
+            </a:pPr>
+            <a:r>
+              <a:rPr sz="1600" b="0">
+                <a:solidFill>
+                  <a:srgbClr val="CBD5E1"/>
+                </a:solidFill>
+                <a:latin typeface="Calibri"/>
+              </a:rPr>
+              <a:t>Nir Waizman  |  August 2026</a:t>
+            </a:r>
+          </a:p>
+        </p:txBody>
+      </p:sp>
+      <p:sp>
+        <p:nvSpPr>
+          <p:cNvPr id="8" name="TextBox 7"/>
+          <p:cNvSpPr txBox="1"/>
+          <p:nvPr/>
+        </p:nvSpPr>
+        <p:spPr>
+          <a:xfrm>
+            <a:off x="11521440" y="6446520"/>
+            <a:ext cx="548640" cy="320040"/>
+          </a:xfrm>
+          <a:prstGeom prst="rect">
+            <a:avLst/>
+          </a:prstGeom>
+          <a:noFill/>
+        </p:spPr>
+        <p:txBody>
+          <a:bodyPr wrap="square">
+            <a:spAutoFit/>
+          </a:bodyPr>
+          <a:lstStyle/>
+          <a:p>
+            <a:pPr algn="r">
+              <a:lnSpc>
+                <a:spcPct val="115000"/>
+              </a:lnSpc>
+            </a:pPr>
+            <a:r>
+              <a:rPr sz="1100" b="0">
+                <a:solidFill>
+                  <a:srgbClr val="CBD5E1"/>
+                </a:solidFill>
+                <a:latin typeface="Calibri"/>
+              </a:rPr>
+              <a:t>1</a:t>
             </a:r>
           </a:p>
         </p:txBody>
@@ -3164,55 +3405,246 @@
       <p:grpSpPr/>
       <p:sp>
         <p:nvSpPr>
-          <p:cNvPr id="2" name="Title 1"/>
-          <p:cNvSpPr>
-            <a:spLocks noGrp="1"/>
-          </p:cNvSpPr>
-          <p:nvPr>
-            <p:ph type="title"/>
-          </p:nvPr>
-        </p:nvSpPr>
-        <p:spPr/>
-        <p:txBody>
-          <a:bodyPr/>
-          <a:lstStyle/>
-          <a:p>
-            <a:r>
-              <a:t>Crew 2 — Data Scientist</a:t>
-            </a:r>
-          </a:p>
-        </p:txBody>
-      </p:sp>
-      <p:sp>
-        <p:nvSpPr>
-          <p:cNvPr id="3" name="Content Placeholder 2"/>
-          <p:cNvSpPr>
-            <a:spLocks noGrp="1"/>
-          </p:cNvSpPr>
-          <p:nvPr>
-            <p:ph idx="1"/>
-          </p:nvPr>
-        </p:nvSpPr>
-        <p:spPr/>
-        <p:txBody>
-          <a:bodyPr/>
-          <a:lstStyle/>
-          <a:p>
-            <a:pPr/>
-            <a:r>
-              <a:t>Contract Validator — confirms data matches the contract, flags leakage risk</a:t>
-            </a:r>
-          </a:p>
-          <a:p>
-            <a:pPr/>
-            <a:r>
-              <a:t>Feature Engineer — produces leakage-free features.csv</a:t>
-            </a:r>
-          </a:p>
-          <a:p>
-            <a:pPr/>
-            <a:r>
-              <a:t>ML Engineer — trains 2 models, compares them, saves model.pkl</a:t>
+          <p:cNvPr id="2" name="Rectangle 1"/>
+          <p:cNvSpPr/>
+          <p:nvPr/>
+        </p:nvSpPr>
+        <p:spPr>
+          <a:xfrm>
+            <a:off x="0" y="0"/>
+            <a:ext cx="12191695" cy="6858000"/>
+          </a:xfrm>
+          <a:prstGeom prst="rect">
+            <a:avLst/>
+          </a:prstGeom>
+          <a:solidFill>
+            <a:srgbClr val="0F172A"/>
+          </a:solidFill>
+          <a:ln>
+            <a:noFill/>
+          </a:ln>
+          <a:effectLst/>
+        </p:spPr>
+        <p:style>
+          <a:lnRef idx="1">
+            <a:schemeClr val="accent1"/>
+          </a:lnRef>
+          <a:fillRef idx="3">
+            <a:schemeClr val="accent1"/>
+          </a:fillRef>
+          <a:effectRef idx="2">
+            <a:schemeClr val="accent1"/>
+          </a:effectRef>
+          <a:fontRef idx="minor">
+            <a:schemeClr val="lt1"/>
+          </a:fontRef>
+        </p:style>
+        <p:txBody>
+          <a:bodyPr rtlCol="0" anchor="ctr"/>
+          <a:lstStyle/>
+          <a:p>
+            <a:pPr algn="ctr"/>
+          </a:p>
+        </p:txBody>
+      </p:sp>
+      <p:sp>
+        <p:nvSpPr>
+          <p:cNvPr id="3" name="Rectangle 2"/>
+          <p:cNvSpPr/>
+          <p:nvPr/>
+        </p:nvSpPr>
+        <p:spPr>
+          <a:xfrm>
+            <a:off x="0" y="0"/>
+            <a:ext cx="137160" cy="6858000"/>
+          </a:xfrm>
+          <a:prstGeom prst="rect">
+            <a:avLst/>
+          </a:prstGeom>
+          <a:solidFill>
+            <a:srgbClr val="10B981"/>
+          </a:solidFill>
+          <a:ln>
+            <a:noFill/>
+          </a:ln>
+          <a:effectLst/>
+        </p:spPr>
+        <p:style>
+          <a:lnRef idx="1">
+            <a:schemeClr val="accent1"/>
+          </a:lnRef>
+          <a:fillRef idx="3">
+            <a:schemeClr val="accent1"/>
+          </a:fillRef>
+          <a:effectRef idx="2">
+            <a:schemeClr val="accent1"/>
+          </a:effectRef>
+          <a:fontRef idx="minor">
+            <a:schemeClr val="lt1"/>
+          </a:fontRef>
+        </p:style>
+        <p:txBody>
+          <a:bodyPr rtlCol="0" anchor="ctr"/>
+          <a:lstStyle/>
+          <a:p>
+            <a:pPr algn="ctr"/>
+          </a:p>
+        </p:txBody>
+      </p:sp>
+      <p:sp>
+        <p:nvSpPr>
+          <p:cNvPr id="4" name="TextBox 3"/>
+          <p:cNvSpPr txBox="1"/>
+          <p:nvPr/>
+        </p:nvSpPr>
+        <p:spPr>
+          <a:xfrm>
+            <a:off x="548640" y="320040"/>
+            <a:ext cx="10972800" cy="731520"/>
+          </a:xfrm>
+          <a:prstGeom prst="rect">
+            <a:avLst/>
+          </a:prstGeom>
+          <a:noFill/>
+        </p:spPr>
+        <p:txBody>
+          <a:bodyPr wrap="square">
+            <a:spAutoFit/>
+          </a:bodyPr>
+          <a:lstStyle/>
+          <a:p>
+            <a:pPr algn="l">
+              <a:lnSpc>
+                <a:spcPct val="115000"/>
+              </a:lnSpc>
+            </a:pPr>
+            <a:r>
+              <a:rPr sz="3000" b="1">
+                <a:solidFill>
+                  <a:srgbClr val="FFFFFF"/>
+                </a:solidFill>
+                <a:latin typeface="Calibri"/>
+              </a:rPr>
+              <a:t>Crew 2 — Data Scientist (3 Agents)</a:t>
+            </a:r>
+          </a:p>
+        </p:txBody>
+      </p:sp>
+      <p:sp>
+        <p:nvSpPr>
+          <p:cNvPr id="5" name="TextBox 4"/>
+          <p:cNvSpPr txBox="1"/>
+          <p:nvPr/>
+        </p:nvSpPr>
+        <p:spPr>
+          <a:xfrm>
+            <a:off x="640080" y="1463040"/>
+            <a:ext cx="10789920" cy="4389120"/>
+          </a:xfrm>
+          <a:prstGeom prst="rect">
+            <a:avLst/>
+          </a:prstGeom>
+          <a:noFill/>
+        </p:spPr>
+        <p:txBody>
+          <a:bodyPr wrap="square">
+            <a:spAutoFit/>
+          </a:bodyPr>
+          <a:lstStyle/>
+          <a:p>
+            <a:pPr>
+              <a:lnSpc>
+                <a:spcPct val="130000"/>
+              </a:lnSpc>
+              <a:spcAft>
+                <a:spcPts val="1000"/>
+              </a:spcAft>
+            </a:pPr>
+            <a:r>
+              <a:rPr sz="1800">
+                <a:solidFill>
+                  <a:srgbClr val="CBD5E1"/>
+                </a:solidFill>
+                <a:latin typeface="Calibri"/>
+              </a:rPr>
+              <a:t>●  Contract Validator — confirms data matches the contract, flags any leakage columns before proceeding.</a:t>
+            </a:r>
+          </a:p>
+          <a:p>
+            <a:pPr>
+              <a:lnSpc>
+                <a:spcPct val="130000"/>
+              </a:lnSpc>
+              <a:spcAft>
+                <a:spcPts val="1000"/>
+              </a:spcAft>
+            </a:pPr>
+            <a:r>
+              <a:rPr sz="1800">
+                <a:solidFill>
+                  <a:srgbClr val="CBD5E1"/>
+                </a:solidFill>
+                <a:latin typeface="Calibri"/>
+              </a:rPr>
+              <a:t>●  Feature Engineer — builds the modeling feature set (features.csv) from validated clean data.</a:t>
+            </a:r>
+          </a:p>
+          <a:p>
+            <a:pPr>
+              <a:lnSpc>
+                <a:spcPct val="130000"/>
+              </a:lnSpc>
+              <a:spcAft>
+                <a:spcPts val="1000"/>
+              </a:spcAft>
+            </a:pPr>
+            <a:r>
+              <a:rPr sz="1800">
+                <a:solidFill>
+                  <a:srgbClr val="CBD5E1"/>
+                </a:solidFill>
+                <a:latin typeface="Calibri"/>
+              </a:rPr>
+              <a:t>●  ML Engineer — trains and evaluates candidate models, selects the best one, writes evaluation_report.md and model_card.md.</a:t>
+            </a:r>
+          </a:p>
+        </p:txBody>
+      </p:sp>
+      <p:sp>
+        <p:nvSpPr>
+          <p:cNvPr id="6" name="TextBox 5"/>
+          <p:cNvSpPr txBox="1"/>
+          <p:nvPr/>
+        </p:nvSpPr>
+        <p:spPr>
+          <a:xfrm>
+            <a:off x="11521440" y="6446520"/>
+            <a:ext cx="548640" cy="320040"/>
+          </a:xfrm>
+          <a:prstGeom prst="rect">
+            <a:avLst/>
+          </a:prstGeom>
+          <a:noFill/>
+        </p:spPr>
+        <p:txBody>
+          <a:bodyPr wrap="square">
+            <a:spAutoFit/>
+          </a:bodyPr>
+          <a:lstStyle/>
+          <a:p>
+            <a:pPr algn="r">
+              <a:lnSpc>
+                <a:spcPct val="115000"/>
+              </a:lnSpc>
+            </a:pPr>
+            <a:r>
+              <a:rPr sz="1100" b="0">
+                <a:solidFill>
+                  <a:srgbClr val="CBD5E1"/>
+                </a:solidFill>
+                <a:latin typeface="Calibri"/>
+              </a:rPr>
+              <a:t>10</a:t>
             </a:r>
           </a:p>
         </p:txBody>
@@ -3237,20 +3669,126 @@
       <p:grpSpPr/>
       <p:sp>
         <p:nvSpPr>
-          <p:cNvPr id="2" name="Title 1"/>
-          <p:cNvSpPr>
-            <a:spLocks noGrp="1"/>
-          </p:cNvSpPr>
-          <p:nvPr>
-            <p:ph type="title"/>
-          </p:nvPr>
-        </p:nvSpPr>
-        <p:spPr/>
-        <p:txBody>
-          <a:bodyPr/>
-          <a:lstStyle/>
-          <a:p>
-            <a:r>
+          <p:cNvPr id="2" name="Rectangle 1"/>
+          <p:cNvSpPr/>
+          <p:nvPr/>
+        </p:nvSpPr>
+        <p:spPr>
+          <a:xfrm>
+            <a:off x="0" y="0"/>
+            <a:ext cx="12191695" cy="6858000"/>
+          </a:xfrm>
+          <a:prstGeom prst="rect">
+            <a:avLst/>
+          </a:prstGeom>
+          <a:solidFill>
+            <a:srgbClr val="0F172A"/>
+          </a:solidFill>
+          <a:ln>
+            <a:noFill/>
+          </a:ln>
+          <a:effectLst/>
+        </p:spPr>
+        <p:style>
+          <a:lnRef idx="1">
+            <a:schemeClr val="accent1"/>
+          </a:lnRef>
+          <a:fillRef idx="3">
+            <a:schemeClr val="accent1"/>
+          </a:fillRef>
+          <a:effectRef idx="2">
+            <a:schemeClr val="accent1"/>
+          </a:effectRef>
+          <a:fontRef idx="minor">
+            <a:schemeClr val="lt1"/>
+          </a:fontRef>
+        </p:style>
+        <p:txBody>
+          <a:bodyPr rtlCol="0" anchor="ctr"/>
+          <a:lstStyle/>
+          <a:p>
+            <a:pPr algn="ctr"/>
+          </a:p>
+        </p:txBody>
+      </p:sp>
+      <p:sp>
+        <p:nvSpPr>
+          <p:cNvPr id="3" name="Rectangle 2"/>
+          <p:cNvSpPr/>
+          <p:nvPr/>
+        </p:nvSpPr>
+        <p:spPr>
+          <a:xfrm>
+            <a:off x="0" y="0"/>
+            <a:ext cx="137160" cy="6858000"/>
+          </a:xfrm>
+          <a:prstGeom prst="rect">
+            <a:avLst/>
+          </a:prstGeom>
+          <a:solidFill>
+            <a:srgbClr val="F97316"/>
+          </a:solidFill>
+          <a:ln>
+            <a:noFill/>
+          </a:ln>
+          <a:effectLst/>
+        </p:spPr>
+        <p:style>
+          <a:lnRef idx="1">
+            <a:schemeClr val="accent1"/>
+          </a:lnRef>
+          <a:fillRef idx="3">
+            <a:schemeClr val="accent1"/>
+          </a:fillRef>
+          <a:effectRef idx="2">
+            <a:schemeClr val="accent1"/>
+          </a:effectRef>
+          <a:fontRef idx="minor">
+            <a:schemeClr val="lt1"/>
+          </a:fontRef>
+        </p:style>
+        <p:txBody>
+          <a:bodyPr rtlCol="0" anchor="ctr"/>
+          <a:lstStyle/>
+          <a:p>
+            <a:pPr algn="ctr"/>
+          </a:p>
+        </p:txBody>
+      </p:sp>
+      <p:sp>
+        <p:nvSpPr>
+          <p:cNvPr id="4" name="TextBox 3"/>
+          <p:cNvSpPr txBox="1"/>
+          <p:nvPr/>
+        </p:nvSpPr>
+        <p:spPr>
+          <a:xfrm>
+            <a:off x="548640" y="320040"/>
+            <a:ext cx="10972800" cy="731520"/>
+          </a:xfrm>
+          <a:prstGeom prst="rect">
+            <a:avLst/>
+          </a:prstGeom>
+          <a:noFill/>
+        </p:spPr>
+        <p:txBody>
+          <a:bodyPr wrap="square">
+            <a:spAutoFit/>
+          </a:bodyPr>
+          <a:lstStyle/>
+          <a:p>
+            <a:pPr algn="l">
+              <a:lnSpc>
+                <a:spcPct val="115000"/>
+              </a:lnSpc>
+            </a:pPr>
+            <a:r>
+              <a:rPr sz="3000" b="1">
+                <a:solidFill>
+                  <a:srgbClr val="FFFFFF"/>
+                </a:solidFill>
+                <a:latin typeface="Calibri"/>
+              </a:rPr>
               <a:t>Model Results</a:t>
             </a:r>
           </a:p>
@@ -3258,40 +3796,208 @@
       </p:sp>
       <p:sp>
         <p:nvSpPr>
-          <p:cNvPr id="3" name="Content Placeholder 2"/>
-          <p:cNvSpPr>
-            <a:spLocks noGrp="1"/>
-          </p:cNvSpPr>
-          <p:nvPr>
-            <p:ph idx="1"/>
-          </p:nvPr>
-        </p:nvSpPr>
-        <p:spPr/>
-        <p:txBody>
-          <a:bodyPr/>
-          <a:lstStyle/>
-          <a:p>
-            <a:pPr/>
-            <a:r>
-              <a:t>Compared RandomForest vs GradientBoosting</a:t>
-            </a:r>
-          </a:p>
-          <a:p>
-            <a:pPr/>
-            <a:r>
-              <a:t>Temporal train/test split (train 2015-2016, test 2017) — no data leakage</a:t>
-            </a:r>
-          </a:p>
-          <a:p>
-            <a:pPr/>
-            <a:r>
-              <a:t>GradientBoosting selected — ROC-AUC 0.876, F1 0.702</a:t>
-            </a:r>
-          </a:p>
-          <a:p>
-            <a:pPr/>
-            <a:r>
-              <a:t>reservation_status excluded as a leakage column — critical modeling discipline</a:t>
+          <p:cNvPr id="5" name="Rounded Rectangle 4"/>
+          <p:cNvSpPr/>
+          <p:nvPr/>
+        </p:nvSpPr>
+        <p:spPr>
+          <a:xfrm>
+            <a:off x="640080" y="1417320"/>
+            <a:ext cx="7498079" cy="4754880"/>
+          </a:xfrm>
+          <a:prstGeom prst="roundRect">
+            <a:avLst/>
+          </a:prstGeom>
+          <a:solidFill>
+            <a:srgbClr val="1E293B"/>
+          </a:solidFill>
+          <a:ln w="12700">
+            <a:solidFill>
+              <a:srgbClr val="334155"/>
+            </a:solidFill>
+          </a:ln>
+          <a:effectLst/>
+        </p:spPr>
+        <p:style>
+          <a:lnRef idx="1">
+            <a:schemeClr val="accent1"/>
+          </a:lnRef>
+          <a:fillRef idx="3">
+            <a:schemeClr val="accent1"/>
+          </a:fillRef>
+          <a:effectRef idx="2">
+            <a:schemeClr val="accent1"/>
+          </a:effectRef>
+          <a:fontRef idx="minor">
+            <a:schemeClr val="lt1"/>
+          </a:fontRef>
+        </p:style>
+        <p:txBody>
+          <a:bodyPr rtlCol="0" anchor="ctr"/>
+          <a:lstStyle/>
+          <a:p>
+            <a:pPr algn="ctr"/>
+          </a:p>
+        </p:txBody>
+      </p:sp>
+      <p:pic>
+        <p:nvPicPr>
+          <p:cNvPr id="6" name="Picture 5" descr="model_comparison.png"/>
+          <p:cNvPicPr>
+            <a:picLocks noChangeAspect="1"/>
+          </p:cNvPicPr>
+          <p:nvPr/>
+        </p:nvPicPr>
+        <p:blipFill>
+          <a:blip r:embed="rId2"/>
+          <a:stretch>
+            <a:fillRect/>
+          </a:stretch>
+        </p:blipFill>
+        <p:spPr>
+          <a:xfrm>
+            <a:off x="731520" y="1508760"/>
+            <a:ext cx="8312727" cy="4572000"/>
+          </a:xfrm>
+          <a:prstGeom prst="rect">
+            <a:avLst/>
+          </a:prstGeom>
+        </p:spPr>
+      </p:pic>
+      <p:sp>
+        <p:nvSpPr>
+          <p:cNvPr id="7" name="TextBox 6"/>
+          <p:cNvSpPr txBox="1"/>
+          <p:nvPr/>
+        </p:nvSpPr>
+        <p:spPr>
+          <a:xfrm>
+            <a:off x="8366760" y="1554480"/>
+            <a:ext cx="3200400" cy="4572000"/>
+          </a:xfrm>
+          <a:prstGeom prst="rect">
+            <a:avLst/>
+          </a:prstGeom>
+          <a:noFill/>
+        </p:spPr>
+        <p:txBody>
+          <a:bodyPr wrap="square">
+            <a:spAutoFit/>
+          </a:bodyPr>
+          <a:lstStyle/>
+          <a:p>
+            <a:pPr>
+              <a:lnSpc>
+                <a:spcPct val="130000"/>
+              </a:lnSpc>
+              <a:spcAft>
+                <a:spcPts val="1000"/>
+              </a:spcAft>
+            </a:pPr>
+            <a:r>
+              <a:rPr sz="1400">
+                <a:solidFill>
+                  <a:srgbClr val="CBD5E1"/>
+                </a:solidFill>
+                <a:latin typeface="Calibri"/>
+              </a:rPr>
+              <a:t>●  Compared RandomForest vs GradientBoosting.</a:t>
+            </a:r>
+          </a:p>
+          <a:p>
+            <a:pPr>
+              <a:lnSpc>
+                <a:spcPct val="130000"/>
+              </a:lnSpc>
+              <a:spcAft>
+                <a:spcPts val="1000"/>
+              </a:spcAft>
+            </a:pPr>
+            <a:r>
+              <a:rPr sz="1400">
+                <a:solidFill>
+                  <a:srgbClr val="CBD5E1"/>
+                </a:solidFill>
+                <a:latin typeface="Calibri"/>
+              </a:rPr>
+              <a:t>●  Temporal train/test split (2015–16 → 2017).</a:t>
+            </a:r>
+          </a:p>
+          <a:p>
+            <a:pPr>
+              <a:lnSpc>
+                <a:spcPct val="130000"/>
+              </a:lnSpc>
+              <a:spcAft>
+                <a:spcPts val="1000"/>
+              </a:spcAft>
+            </a:pPr>
+            <a:r>
+              <a:rPr sz="1400">
+                <a:solidFill>
+                  <a:srgbClr val="CBD5E1"/>
+                </a:solidFill>
+                <a:latin typeface="Calibri"/>
+              </a:rPr>
+              <a:t>●  GradientBoosting selected: ROC-AUC 0.875, F1 0.693.</a:t>
+            </a:r>
+          </a:p>
+          <a:p>
+            <a:pPr>
+              <a:lnSpc>
+                <a:spcPct val="130000"/>
+              </a:lnSpc>
+              <a:spcAft>
+                <a:spcPts val="1000"/>
+              </a:spcAft>
+            </a:pPr>
+            <a:r>
+              <a:rPr sz="1400">
+                <a:solidFill>
+                  <a:srgbClr val="CBD5E1"/>
+                </a:solidFill>
+                <a:latin typeface="Calibri"/>
+              </a:rPr>
+              <a:t>●  Edges out RandomForest on ROC-AUC (0.875 vs 0.871).</a:t>
+            </a:r>
+          </a:p>
+        </p:txBody>
+      </p:sp>
+      <p:sp>
+        <p:nvSpPr>
+          <p:cNvPr id="8" name="TextBox 7"/>
+          <p:cNvSpPr txBox="1"/>
+          <p:nvPr/>
+        </p:nvSpPr>
+        <p:spPr>
+          <a:xfrm>
+            <a:off x="11521440" y="6446520"/>
+            <a:ext cx="548640" cy="320040"/>
+          </a:xfrm>
+          <a:prstGeom prst="rect">
+            <a:avLst/>
+          </a:prstGeom>
+          <a:noFill/>
+        </p:spPr>
+        <p:txBody>
+          <a:bodyPr wrap="square">
+            <a:spAutoFit/>
+          </a:bodyPr>
+          <a:lstStyle/>
+          <a:p>
+            <a:pPr algn="r">
+              <a:lnSpc>
+                <a:spcPct val="115000"/>
+              </a:lnSpc>
+            </a:pPr>
+            <a:r>
+              <a:rPr sz="1100" b="0">
+                <a:solidFill>
+                  <a:srgbClr val="CBD5E1"/>
+                </a:solidFill>
+                <a:latin typeface="Calibri"/>
+              </a:rPr>
+              <a:t>11</a:t>
             </a:r>
           </a:p>
         </p:txBody>
@@ -3316,20 +4022,126 @@
       <p:grpSpPr/>
       <p:sp>
         <p:nvSpPr>
-          <p:cNvPr id="2" name="Title 1"/>
-          <p:cNvSpPr>
-            <a:spLocks noGrp="1"/>
-          </p:cNvSpPr>
-          <p:nvPr>
-            <p:ph type="title"/>
-          </p:nvPr>
-        </p:nvSpPr>
-        <p:spPr/>
-        <p:txBody>
-          <a:bodyPr/>
-          <a:lstStyle/>
-          <a:p>
-            <a:r>
+          <p:cNvPr id="2" name="Rectangle 1"/>
+          <p:cNvSpPr/>
+          <p:nvPr/>
+        </p:nvSpPr>
+        <p:spPr>
+          <a:xfrm>
+            <a:off x="0" y="0"/>
+            <a:ext cx="12191695" cy="6858000"/>
+          </a:xfrm>
+          <a:prstGeom prst="rect">
+            <a:avLst/>
+          </a:prstGeom>
+          <a:solidFill>
+            <a:srgbClr val="0F172A"/>
+          </a:solidFill>
+          <a:ln>
+            <a:noFill/>
+          </a:ln>
+          <a:effectLst/>
+        </p:spPr>
+        <p:style>
+          <a:lnRef idx="1">
+            <a:schemeClr val="accent1"/>
+          </a:lnRef>
+          <a:fillRef idx="3">
+            <a:schemeClr val="accent1"/>
+          </a:fillRef>
+          <a:effectRef idx="2">
+            <a:schemeClr val="accent1"/>
+          </a:effectRef>
+          <a:fontRef idx="minor">
+            <a:schemeClr val="lt1"/>
+          </a:fontRef>
+        </p:style>
+        <p:txBody>
+          <a:bodyPr rtlCol="0" anchor="ctr"/>
+          <a:lstStyle/>
+          <a:p>
+            <a:pPr algn="ctr"/>
+          </a:p>
+        </p:txBody>
+      </p:sp>
+      <p:sp>
+        <p:nvSpPr>
+          <p:cNvPr id="3" name="Rectangle 2"/>
+          <p:cNvSpPr/>
+          <p:nvPr/>
+        </p:nvSpPr>
+        <p:spPr>
+          <a:xfrm>
+            <a:off x="0" y="0"/>
+            <a:ext cx="137160" cy="6858000"/>
+          </a:xfrm>
+          <a:prstGeom prst="rect">
+            <a:avLst/>
+          </a:prstGeom>
+          <a:solidFill>
+            <a:srgbClr val="F97316"/>
+          </a:solidFill>
+          <a:ln>
+            <a:noFill/>
+          </a:ln>
+          <a:effectLst/>
+        </p:spPr>
+        <p:style>
+          <a:lnRef idx="1">
+            <a:schemeClr val="accent1"/>
+          </a:lnRef>
+          <a:fillRef idx="3">
+            <a:schemeClr val="accent1"/>
+          </a:fillRef>
+          <a:effectRef idx="2">
+            <a:schemeClr val="accent1"/>
+          </a:effectRef>
+          <a:fontRef idx="minor">
+            <a:schemeClr val="lt1"/>
+          </a:fontRef>
+        </p:style>
+        <p:txBody>
+          <a:bodyPr rtlCol="0" anchor="ctr"/>
+          <a:lstStyle/>
+          <a:p>
+            <a:pPr algn="ctr"/>
+          </a:p>
+        </p:txBody>
+      </p:sp>
+      <p:sp>
+        <p:nvSpPr>
+          <p:cNvPr id="4" name="TextBox 3"/>
+          <p:cNvSpPr txBox="1"/>
+          <p:nvPr/>
+        </p:nvSpPr>
+        <p:spPr>
+          <a:xfrm>
+            <a:off x="548640" y="320040"/>
+            <a:ext cx="10972800" cy="731520"/>
+          </a:xfrm>
+          <a:prstGeom prst="rect">
+            <a:avLst/>
+          </a:prstGeom>
+          <a:noFill/>
+        </p:spPr>
+        <p:txBody>
+          <a:bodyPr wrap="square">
+            <a:spAutoFit/>
+          </a:bodyPr>
+          <a:lstStyle/>
+          <a:p>
+            <a:pPr algn="l">
+              <a:lnSpc>
+                <a:spcPct val="115000"/>
+              </a:lnSpc>
+            </a:pPr>
+            <a:r>
+              <a:rPr sz="3000" b="1">
+                <a:solidFill>
+                  <a:srgbClr val="FFFFFF"/>
+                </a:solidFill>
+                <a:latin typeface="Calibri"/>
+              </a:rPr>
               <a:t>Model Card — Responsible AI</a:t>
             </a:r>
           </a:p>
@@ -3337,40 +4149,157 @@
       </p:sp>
       <p:sp>
         <p:nvSpPr>
-          <p:cNvPr id="3" name="Content Placeholder 2"/>
-          <p:cNvSpPr>
-            <a:spLocks noGrp="1"/>
-          </p:cNvSpPr>
-          <p:nvPr>
-            <p:ph idx="1"/>
-          </p:nvPr>
-        </p:nvSpPr>
-        <p:spPr/>
-        <p:txBody>
-          <a:bodyPr/>
-          <a:lstStyle/>
-          <a:p>
-            <a:pPr/>
-            <a:r>
-              <a:t>Purpose: support overbooking/deposit decisions, not deny individual guests</a:t>
-            </a:r>
-          </a:p>
-          <a:p>
-            <a:pPr/>
-            <a:r>
-              <a:t>Limitations: Portugal-only data, ~63% recall, no pandemic-era patterns</a:t>
-            </a:r>
-          </a:p>
-          <a:p>
-            <a:pPr/>
-            <a:r>
-              <a:t>Ethical considerations: country feature flagged as a bias risk</a:t>
-            </a:r>
-          </a:p>
-          <a:p>
-            <a:pPr/>
-            <a:r>
-              <a:t>Predictions are advisory — human review required before policy action</a:t>
+          <p:cNvPr id="5" name="TextBox 4"/>
+          <p:cNvSpPr txBox="1"/>
+          <p:nvPr/>
+        </p:nvSpPr>
+        <p:spPr>
+          <a:xfrm>
+            <a:off x="640080" y="1463040"/>
+            <a:ext cx="10789920" cy="4572000"/>
+          </a:xfrm>
+          <a:prstGeom prst="rect">
+            <a:avLst/>
+          </a:prstGeom>
+          <a:noFill/>
+        </p:spPr>
+        <p:txBody>
+          <a:bodyPr wrap="square">
+            <a:spAutoFit/>
+          </a:bodyPr>
+          <a:lstStyle/>
+          <a:p>
+            <a:pPr>
+              <a:lnSpc>
+                <a:spcPct val="130000"/>
+              </a:lnSpc>
+              <a:spcAft>
+                <a:spcPts val="1000"/>
+              </a:spcAft>
+            </a:pPr>
+            <a:r>
+              <a:rPr sz="1700">
+                <a:solidFill>
+                  <a:srgbClr val="CBD5E1"/>
+                </a:solidFill>
+                <a:latin typeface="Calibri"/>
+              </a:rPr>
+              <a:t>●  Purpose: support overbooking / deposit-policy decisions — not to deny individual guests service.</a:t>
+            </a:r>
+          </a:p>
+          <a:p>
+            <a:pPr>
+              <a:lnSpc>
+                <a:spcPct val="130000"/>
+              </a:lnSpc>
+              <a:spcAft>
+                <a:spcPts val="1000"/>
+              </a:spcAft>
+            </a:pPr>
+            <a:r>
+              <a:rPr sz="1700">
+                <a:solidFill>
+                  <a:srgbClr val="CBD5E1"/>
+                </a:solidFill>
+                <a:latin typeface="Calibri"/>
+              </a:rPr>
+              <a:t>●  Model: GradientBoostingClassifier, trained on 2015–2016 bookings, tested on 2017 (temporal holdout).</a:t>
+            </a:r>
+          </a:p>
+          <a:p>
+            <a:pPr>
+              <a:lnSpc>
+                <a:spcPct val="130000"/>
+              </a:lnSpc>
+              <a:spcAft>
+                <a:spcPts val="1000"/>
+              </a:spcAft>
+            </a:pPr>
+            <a:r>
+              <a:rPr sz="1700">
+                <a:solidFill>
+                  <a:srgbClr val="CBD5E1"/>
+                </a:solidFill>
+                <a:latin typeface="Calibri"/>
+              </a:rPr>
+              <a:t>●  Performance: Accuracy 78.7%, Precision 79.1%, Recall 61.7%, F1 0.693, ROC-AUC 0.875.</a:t>
+            </a:r>
+          </a:p>
+          <a:p>
+            <a:pPr>
+              <a:lnSpc>
+                <a:spcPct val="130000"/>
+              </a:lnSpc>
+              <a:spcAft>
+                <a:spcPts val="1000"/>
+              </a:spcAft>
+            </a:pPr>
+            <a:r>
+              <a:rPr sz="1700">
+                <a:solidFill>
+                  <a:srgbClr val="CBD5E1"/>
+                </a:solidFill>
+                <a:latin typeface="Calibri"/>
+              </a:rPr>
+              <a:t>●  Known limitation: recall of ~62% means ~38% of true cancellations are missed — model should support, not replace, human judgment.</a:t>
+            </a:r>
+          </a:p>
+          <a:p>
+            <a:pPr>
+              <a:lnSpc>
+                <a:spcPct val="130000"/>
+              </a:lnSpc>
+              <a:spcAft>
+                <a:spcPts val="1000"/>
+              </a:spcAft>
+            </a:pPr>
+            <a:r>
+              <a:rPr sz="1700">
+                <a:solidFill>
+                  <a:srgbClr val="CBD5E1"/>
+                </a:solidFill>
+                <a:latin typeface="Calibri"/>
+              </a:rPr>
+              <a:t>●  No PII used as a feature; country and market segment are aggregate categorical fields only.</a:t>
+            </a:r>
+          </a:p>
+        </p:txBody>
+      </p:sp>
+      <p:sp>
+        <p:nvSpPr>
+          <p:cNvPr id="6" name="TextBox 5"/>
+          <p:cNvSpPr txBox="1"/>
+          <p:nvPr/>
+        </p:nvSpPr>
+        <p:spPr>
+          <a:xfrm>
+            <a:off x="11521440" y="6446520"/>
+            <a:ext cx="548640" cy="320040"/>
+          </a:xfrm>
+          <a:prstGeom prst="rect">
+            <a:avLst/>
+          </a:prstGeom>
+          <a:noFill/>
+        </p:spPr>
+        <p:txBody>
+          <a:bodyPr wrap="square">
+            <a:spAutoFit/>
+          </a:bodyPr>
+          <a:lstStyle/>
+          <a:p>
+            <a:pPr algn="r">
+              <a:lnSpc>
+                <a:spcPct val="115000"/>
+              </a:lnSpc>
+            </a:pPr>
+            <a:r>
+              <a:rPr sz="1100" b="0">
+                <a:solidFill>
+                  <a:srgbClr val="CBD5E1"/>
+                </a:solidFill>
+                <a:latin typeface="Calibri"/>
+              </a:rPr>
+              <a:t>12</a:t>
             </a:r>
           </a:p>
         </p:txBody>
@@ -3395,20 +4324,126 @@
       <p:grpSpPr/>
       <p:sp>
         <p:nvSpPr>
-          <p:cNvPr id="2" name="Title 1"/>
-          <p:cNvSpPr>
-            <a:spLocks noGrp="1"/>
-          </p:cNvSpPr>
-          <p:nvPr>
-            <p:ph type="title"/>
-          </p:nvPr>
-        </p:nvSpPr>
-        <p:spPr/>
-        <p:txBody>
-          <a:bodyPr/>
-          <a:lstStyle/>
-          <a:p>
-            <a:r>
+          <p:cNvPr id="2" name="Rectangle 1"/>
+          <p:cNvSpPr/>
+          <p:nvPr/>
+        </p:nvSpPr>
+        <p:spPr>
+          <a:xfrm>
+            <a:off x="0" y="0"/>
+            <a:ext cx="12191695" cy="6858000"/>
+          </a:xfrm>
+          <a:prstGeom prst="rect">
+            <a:avLst/>
+          </a:prstGeom>
+          <a:solidFill>
+            <a:srgbClr val="0F172A"/>
+          </a:solidFill>
+          <a:ln>
+            <a:noFill/>
+          </a:ln>
+          <a:effectLst/>
+        </p:spPr>
+        <p:style>
+          <a:lnRef idx="1">
+            <a:schemeClr val="accent1"/>
+          </a:lnRef>
+          <a:fillRef idx="3">
+            <a:schemeClr val="accent1"/>
+          </a:fillRef>
+          <a:effectRef idx="2">
+            <a:schemeClr val="accent1"/>
+          </a:effectRef>
+          <a:fontRef idx="minor">
+            <a:schemeClr val="lt1"/>
+          </a:fontRef>
+        </p:style>
+        <p:txBody>
+          <a:bodyPr rtlCol="0" anchor="ctr"/>
+          <a:lstStyle/>
+          <a:p>
+            <a:pPr algn="ctr"/>
+          </a:p>
+        </p:txBody>
+      </p:sp>
+      <p:sp>
+        <p:nvSpPr>
+          <p:cNvPr id="3" name="Rectangle 2"/>
+          <p:cNvSpPr/>
+          <p:nvPr/>
+        </p:nvSpPr>
+        <p:spPr>
+          <a:xfrm>
+            <a:off x="0" y="0"/>
+            <a:ext cx="137160" cy="6858000"/>
+          </a:xfrm>
+          <a:prstGeom prst="rect">
+            <a:avLst/>
+          </a:prstGeom>
+          <a:solidFill>
+            <a:srgbClr val="10B981"/>
+          </a:solidFill>
+          <a:ln>
+            <a:noFill/>
+          </a:ln>
+          <a:effectLst/>
+        </p:spPr>
+        <p:style>
+          <a:lnRef idx="1">
+            <a:schemeClr val="accent1"/>
+          </a:lnRef>
+          <a:fillRef idx="3">
+            <a:schemeClr val="accent1"/>
+          </a:fillRef>
+          <a:effectRef idx="2">
+            <a:schemeClr val="accent1"/>
+          </a:effectRef>
+          <a:fontRef idx="minor">
+            <a:schemeClr val="lt1"/>
+          </a:fontRef>
+        </p:style>
+        <p:txBody>
+          <a:bodyPr rtlCol="0" anchor="ctr"/>
+          <a:lstStyle/>
+          <a:p>
+            <a:pPr algn="ctr"/>
+          </a:p>
+        </p:txBody>
+      </p:sp>
+      <p:sp>
+        <p:nvSpPr>
+          <p:cNvPr id="4" name="TextBox 3"/>
+          <p:cNvSpPr txBox="1"/>
+          <p:nvPr/>
+        </p:nvSpPr>
+        <p:spPr>
+          <a:xfrm>
+            <a:off x="548640" y="320040"/>
+            <a:ext cx="10972800" cy="731520"/>
+          </a:xfrm>
+          <a:prstGeom prst="rect">
+            <a:avLst/>
+          </a:prstGeom>
+          <a:noFill/>
+        </p:spPr>
+        <p:txBody>
+          <a:bodyPr wrap="square">
+            <a:spAutoFit/>
+          </a:bodyPr>
+          <a:lstStyle/>
+          <a:p>
+            <a:pPr algn="l">
+              <a:lnSpc>
+                <a:spcPct val="115000"/>
+              </a:lnSpc>
+            </a:pPr>
+            <a:r>
+              <a:rPr sz="3000" b="1">
+                <a:solidFill>
+                  <a:srgbClr val="FFFFFF"/>
+                </a:solidFill>
+                <a:latin typeface="Calibri"/>
+              </a:rPr>
               <a:t>Streamlit Application</a:t>
             </a:r>
           </a:p>
@@ -3416,40 +4451,208 @@
       </p:sp>
       <p:sp>
         <p:nvSpPr>
-          <p:cNvPr id="3" name="Content Placeholder 2"/>
-          <p:cNvSpPr>
-            <a:spLocks noGrp="1"/>
-          </p:cNvSpPr>
-          <p:nvPr>
-            <p:ph idx="1"/>
-          </p:nvPr>
-        </p:nvSpPr>
-        <p:spPr/>
-        <p:txBody>
-          <a:bodyPr/>
-          <a:lstStyle/>
-          <a:p>
-            <a:pPr/>
-            <a:r>
-              <a:t>Overview tab — explains the architecture</a:t>
-            </a:r>
-          </a:p>
-          <a:p>
-            <a:pPr/>
-            <a:r>
-              <a:t>Run Flow tab — triggers the full CrewAI Flow live</a:t>
-            </a:r>
-          </a:p>
-          <a:p>
-            <a:pPr/>
-            <a:r>
-              <a:t>EDA &amp; Insights tab — interactive charts + business insights</a:t>
-            </a:r>
-          </a:p>
-          <a:p>
-            <a:pPr/>
-            <a:r>
-              <a:t>Model Results tab — live cancellation probability predictor</a:t>
+          <p:cNvPr id="5" name="TextBox 4"/>
+          <p:cNvSpPr txBox="1"/>
+          <p:nvPr/>
+        </p:nvSpPr>
+        <p:spPr>
+          <a:xfrm>
+            <a:off x="640080" y="1417320"/>
+            <a:ext cx="4023360" cy="4754880"/>
+          </a:xfrm>
+          <a:prstGeom prst="rect">
+            <a:avLst/>
+          </a:prstGeom>
+          <a:noFill/>
+        </p:spPr>
+        <p:txBody>
+          <a:bodyPr wrap="square">
+            <a:spAutoFit/>
+          </a:bodyPr>
+          <a:lstStyle/>
+          <a:p>
+            <a:pPr>
+              <a:lnSpc>
+                <a:spcPct val="130000"/>
+              </a:lnSpc>
+              <a:spcAft>
+                <a:spcPts val="1000"/>
+              </a:spcAft>
+            </a:pPr>
+            <a:r>
+              <a:rPr sz="1500">
+                <a:solidFill>
+                  <a:srgbClr val="CBD5E1"/>
+                </a:solidFill>
+                <a:latin typeface="Calibri"/>
+              </a:rPr>
+              <a:t>●  Overview tab — explains the architecture.</a:t>
+            </a:r>
+          </a:p>
+          <a:p>
+            <a:pPr>
+              <a:lnSpc>
+                <a:spcPct val="130000"/>
+              </a:lnSpc>
+              <a:spcAft>
+                <a:spcPts val="1000"/>
+              </a:spcAft>
+            </a:pPr>
+            <a:r>
+              <a:rPr sz="1500">
+                <a:solidFill>
+                  <a:srgbClr val="CBD5E1"/>
+                </a:solidFill>
+                <a:latin typeface="Calibri"/>
+              </a:rPr>
+              <a:t>●  Run Flow tab — triggers the live CrewAI Flow end-to-end.</a:t>
+            </a:r>
+          </a:p>
+          <a:p>
+            <a:pPr>
+              <a:lnSpc>
+                <a:spcPct val="130000"/>
+              </a:lnSpc>
+              <a:spcAft>
+                <a:spcPts val="1000"/>
+              </a:spcAft>
+            </a:pPr>
+            <a:r>
+              <a:rPr sz="1500">
+                <a:solidFill>
+                  <a:srgbClr val="CBD5E1"/>
+                </a:solidFill>
+                <a:latin typeface="Calibri"/>
+              </a:rPr>
+              <a:t>●  EDA tab — interactive charts on the cleaned dataset.</a:t>
+            </a:r>
+          </a:p>
+          <a:p>
+            <a:pPr>
+              <a:lnSpc>
+                <a:spcPct val="130000"/>
+              </a:lnSpc>
+              <a:spcAft>
+                <a:spcPts val="1000"/>
+              </a:spcAft>
+            </a:pPr>
+            <a:r>
+              <a:rPr sz="1500">
+                <a:solidFill>
+                  <a:srgbClr val="CBD5E1"/>
+                </a:solidFill>
+                <a:latin typeface="Calibri"/>
+              </a:rPr>
+              <a:t>●  Model tab — live cancellation-risk prediction from user input.</a:t>
+            </a:r>
+          </a:p>
+        </p:txBody>
+      </p:sp>
+      <p:sp>
+        <p:nvSpPr>
+          <p:cNvPr id="6" name="Rounded Rectangle 5"/>
+          <p:cNvSpPr/>
+          <p:nvPr/>
+        </p:nvSpPr>
+        <p:spPr>
+          <a:xfrm>
+            <a:off x="4846320" y="1417320"/>
+            <a:ext cx="6675120" cy="4846320"/>
+          </a:xfrm>
+          <a:prstGeom prst="roundRect">
+            <a:avLst/>
+          </a:prstGeom>
+          <a:solidFill>
+            <a:srgbClr val="1E293B"/>
+          </a:solidFill>
+          <a:ln w="12700">
+            <a:solidFill>
+              <a:srgbClr val="334155"/>
+            </a:solidFill>
+          </a:ln>
+          <a:effectLst/>
+        </p:spPr>
+        <p:style>
+          <a:lnRef idx="1">
+            <a:schemeClr val="accent1"/>
+          </a:lnRef>
+          <a:fillRef idx="3">
+            <a:schemeClr val="accent1"/>
+          </a:fillRef>
+          <a:effectRef idx="2">
+            <a:schemeClr val="accent1"/>
+          </a:effectRef>
+          <a:fontRef idx="minor">
+            <a:schemeClr val="lt1"/>
+          </a:fontRef>
+        </p:style>
+        <p:txBody>
+          <a:bodyPr rtlCol="0" anchor="ctr"/>
+          <a:lstStyle/>
+          <a:p>
+            <a:pPr algn="ctr"/>
+          </a:p>
+        </p:txBody>
+      </p:sp>
+      <p:pic>
+        <p:nvPicPr>
+          <p:cNvPr id="7" name="Picture 6" descr="screenshot-app.png"/>
+          <p:cNvPicPr>
+            <a:picLocks noChangeAspect="1"/>
+          </p:cNvPicPr>
+          <p:nvPr/>
+        </p:nvPicPr>
+        <p:blipFill>
+          <a:blip r:embed="rId2"/>
+          <a:stretch>
+            <a:fillRect/>
+          </a:stretch>
+        </p:blipFill>
+        <p:spPr>
+          <a:xfrm>
+            <a:off x="4937760" y="1508760"/>
+            <a:ext cx="8290560" cy="4663440"/>
+          </a:xfrm>
+          <a:prstGeom prst="rect">
+            <a:avLst/>
+          </a:prstGeom>
+        </p:spPr>
+      </p:pic>
+      <p:sp>
+        <p:nvSpPr>
+          <p:cNvPr id="8" name="TextBox 7"/>
+          <p:cNvSpPr txBox="1"/>
+          <p:nvPr/>
+        </p:nvSpPr>
+        <p:spPr>
+          <a:xfrm>
+            <a:off x="11521440" y="6446520"/>
+            <a:ext cx="548640" cy="320040"/>
+          </a:xfrm>
+          <a:prstGeom prst="rect">
+            <a:avLst/>
+          </a:prstGeom>
+          <a:noFill/>
+        </p:spPr>
+        <p:txBody>
+          <a:bodyPr wrap="square">
+            <a:spAutoFit/>
+          </a:bodyPr>
+          <a:lstStyle/>
+          <a:p>
+            <a:pPr algn="r">
+              <a:lnSpc>
+                <a:spcPct val="115000"/>
+              </a:lnSpc>
+            </a:pPr>
+            <a:r>
+              <a:rPr sz="1100" b="0">
+                <a:solidFill>
+                  <a:srgbClr val="CBD5E1"/>
+                </a:solidFill>
+                <a:latin typeface="Calibri"/>
+              </a:rPr>
+              <a:t>13</a:t>
             </a:r>
           </a:p>
         </p:txBody>
@@ -3474,20 +4677,126 @@
       <p:grpSpPr/>
       <p:sp>
         <p:nvSpPr>
-          <p:cNvPr id="2" name="Title 1"/>
-          <p:cNvSpPr>
-            <a:spLocks noGrp="1"/>
-          </p:cNvSpPr>
-          <p:nvPr>
-            <p:ph type="title"/>
-          </p:nvPr>
-        </p:nvSpPr>
-        <p:spPr/>
-        <p:txBody>
-          <a:bodyPr/>
-          <a:lstStyle/>
-          <a:p>
-            <a:r>
+          <p:cNvPr id="2" name="Rectangle 1"/>
+          <p:cNvSpPr/>
+          <p:nvPr/>
+        </p:nvSpPr>
+        <p:spPr>
+          <a:xfrm>
+            <a:off x="0" y="0"/>
+            <a:ext cx="12191695" cy="6858000"/>
+          </a:xfrm>
+          <a:prstGeom prst="rect">
+            <a:avLst/>
+          </a:prstGeom>
+          <a:solidFill>
+            <a:srgbClr val="0F172A"/>
+          </a:solidFill>
+          <a:ln>
+            <a:noFill/>
+          </a:ln>
+          <a:effectLst/>
+        </p:spPr>
+        <p:style>
+          <a:lnRef idx="1">
+            <a:schemeClr val="accent1"/>
+          </a:lnRef>
+          <a:fillRef idx="3">
+            <a:schemeClr val="accent1"/>
+          </a:fillRef>
+          <a:effectRef idx="2">
+            <a:schemeClr val="accent1"/>
+          </a:effectRef>
+          <a:fontRef idx="minor">
+            <a:schemeClr val="lt1"/>
+          </a:fontRef>
+        </p:style>
+        <p:txBody>
+          <a:bodyPr rtlCol="0" anchor="ctr"/>
+          <a:lstStyle/>
+          <a:p>
+            <a:pPr algn="ctr"/>
+          </a:p>
+        </p:txBody>
+      </p:sp>
+      <p:sp>
+        <p:nvSpPr>
+          <p:cNvPr id="3" name="Rectangle 2"/>
+          <p:cNvSpPr/>
+          <p:nvPr/>
+        </p:nvSpPr>
+        <p:spPr>
+          <a:xfrm>
+            <a:off x="0" y="0"/>
+            <a:ext cx="137160" cy="6858000"/>
+          </a:xfrm>
+          <a:prstGeom prst="rect">
+            <a:avLst/>
+          </a:prstGeom>
+          <a:solidFill>
+            <a:srgbClr val="F97316"/>
+          </a:solidFill>
+          <a:ln>
+            <a:noFill/>
+          </a:ln>
+          <a:effectLst/>
+        </p:spPr>
+        <p:style>
+          <a:lnRef idx="1">
+            <a:schemeClr val="accent1"/>
+          </a:lnRef>
+          <a:fillRef idx="3">
+            <a:schemeClr val="accent1"/>
+          </a:fillRef>
+          <a:effectRef idx="2">
+            <a:schemeClr val="accent1"/>
+          </a:effectRef>
+          <a:fontRef idx="minor">
+            <a:schemeClr val="lt1"/>
+          </a:fontRef>
+        </p:style>
+        <p:txBody>
+          <a:bodyPr rtlCol="0" anchor="ctr"/>
+          <a:lstStyle/>
+          <a:p>
+            <a:pPr algn="ctr"/>
+          </a:p>
+        </p:txBody>
+      </p:sp>
+      <p:sp>
+        <p:nvSpPr>
+          <p:cNvPr id="4" name="TextBox 3"/>
+          <p:cNvSpPr txBox="1"/>
+          <p:nvPr/>
+        </p:nvSpPr>
+        <p:spPr>
+          <a:xfrm>
+            <a:off x="548640" y="320040"/>
+            <a:ext cx="10972800" cy="731520"/>
+          </a:xfrm>
+          <a:prstGeom prst="rect">
+            <a:avLst/>
+          </a:prstGeom>
+          <a:noFill/>
+        </p:spPr>
+        <p:txBody>
+          <a:bodyPr wrap="square">
+            <a:spAutoFit/>
+          </a:bodyPr>
+          <a:lstStyle/>
+          <a:p>
+            <a:pPr algn="l">
+              <a:lnSpc>
+                <a:spcPct val="115000"/>
+              </a:lnSpc>
+            </a:pPr>
+            <a:r>
+              <a:rPr sz="3000" b="1">
+                <a:solidFill>
+                  <a:srgbClr val="FFFFFF"/>
+                </a:solidFill>
+                <a:latin typeface="Calibri"/>
+              </a:rPr>
               <a:t>Tech Stack &amp; Reproducibility</a:t>
             </a:r>
           </a:p>
@@ -3495,40 +4804,157 @@
       </p:sp>
       <p:sp>
         <p:nvSpPr>
-          <p:cNvPr id="3" name="Content Placeholder 2"/>
-          <p:cNvSpPr>
-            <a:spLocks noGrp="1"/>
-          </p:cNvSpPr>
-          <p:nvPr>
-            <p:ph idx="1"/>
-          </p:nvPr>
-        </p:nvSpPr>
-        <p:spPr/>
-        <p:txBody>
-          <a:bodyPr/>
-          <a:lstStyle/>
-          <a:p>
-            <a:pPr/>
-            <a:r>
-              <a:t>CrewAI, Python 3.12, GitHub, Streamlit</a:t>
-            </a:r>
-          </a:p>
-          <a:p>
-            <a:pPr/>
-            <a:r>
-              <a:t>Pandas, Scikit-Learn for data + modeling</a:t>
-            </a:r>
-          </a:p>
-          <a:p>
-            <a:pPr/>
-            <a:r>
-              <a:t>All artifacts version-controlled and reproducible from data/raw</a:t>
-            </a:r>
-          </a:p>
-          <a:p>
-            <a:pPr/>
-            <a:r>
-              <a:t>Deterministic tools (not LLM hallucination) for every data operation</a:t>
+          <p:cNvPr id="5" name="TextBox 4"/>
+          <p:cNvSpPr txBox="1"/>
+          <p:nvPr/>
+        </p:nvSpPr>
+        <p:spPr>
+          <a:xfrm>
+            <a:off x="640080" y="1463040"/>
+            <a:ext cx="10789920" cy="4572000"/>
+          </a:xfrm>
+          <a:prstGeom prst="rect">
+            <a:avLst/>
+          </a:prstGeom>
+          <a:noFill/>
+        </p:spPr>
+        <p:txBody>
+          <a:bodyPr wrap="square">
+            <a:spAutoFit/>
+          </a:bodyPr>
+          <a:lstStyle/>
+          <a:p>
+            <a:pPr>
+              <a:lnSpc>
+                <a:spcPct val="130000"/>
+              </a:lnSpc>
+              <a:spcAft>
+                <a:spcPts val="1000"/>
+              </a:spcAft>
+            </a:pPr>
+            <a:r>
+              <a:rPr sz="1700">
+                <a:solidFill>
+                  <a:srgbClr val="CBD5E1"/>
+                </a:solidFill>
+                <a:latin typeface="Calibri"/>
+              </a:rPr>
+              <a:t>●  CrewAI, Python 3.12, GitHub, Streamlit.</a:t>
+            </a:r>
+          </a:p>
+          <a:p>
+            <a:pPr>
+              <a:lnSpc>
+                <a:spcPct val="130000"/>
+              </a:lnSpc>
+              <a:spcAft>
+                <a:spcPts val="1000"/>
+              </a:spcAft>
+            </a:pPr>
+            <a:r>
+              <a:rPr sz="1700">
+                <a:solidFill>
+                  <a:srgbClr val="CBD5E1"/>
+                </a:solidFill>
+                <a:latin typeface="Calibri"/>
+              </a:rPr>
+              <a:t>●  Pandas, Scikit-Learn, Matplotlib/Seaborn for data + modeling.</a:t>
+            </a:r>
+          </a:p>
+          <a:p>
+            <a:pPr>
+              <a:lnSpc>
+                <a:spcPct val="130000"/>
+              </a:lnSpc>
+              <a:spcAft>
+                <a:spcPts val="1000"/>
+              </a:spcAft>
+            </a:pPr>
+            <a:r>
+              <a:rPr sz="1700">
+                <a:solidFill>
+                  <a:srgbClr val="CBD5E1"/>
+                </a:solidFill>
+                <a:latin typeface="Calibri"/>
+              </a:rPr>
+              <a:t>●  Claude (Anthropic) as the LLM backing every agent.</a:t>
+            </a:r>
+          </a:p>
+          <a:p>
+            <a:pPr>
+              <a:lnSpc>
+                <a:spcPct val="130000"/>
+              </a:lnSpc>
+              <a:spcAft>
+                <a:spcPts val="1000"/>
+              </a:spcAft>
+            </a:pPr>
+            <a:r>
+              <a:rPr sz="1700">
+                <a:solidFill>
+                  <a:srgbClr val="CBD5E1"/>
+                </a:solidFill>
+                <a:latin typeface="Calibri"/>
+              </a:rPr>
+              <a:t>●  Fully reproducible: requirements.txt, .env-based secrets (excluded from Git), documented outputs contract.</a:t>
+            </a:r>
+          </a:p>
+          <a:p>
+            <a:pPr>
+              <a:lnSpc>
+                <a:spcPct val="130000"/>
+              </a:lnSpc>
+              <a:spcAft>
+                <a:spcPts val="1000"/>
+              </a:spcAft>
+            </a:pPr>
+            <a:r>
+              <a:rPr sz="1700">
+                <a:solidFill>
+                  <a:srgbClr val="CBD5E1"/>
+                </a:solidFill>
+                <a:latin typeface="Calibri"/>
+              </a:rPr>
+              <a:t>●  Public repo: github.com/nirwaizman/toto-final-project</a:t>
+            </a:r>
+          </a:p>
+        </p:txBody>
+      </p:sp>
+      <p:sp>
+        <p:nvSpPr>
+          <p:cNvPr id="6" name="TextBox 5"/>
+          <p:cNvSpPr txBox="1"/>
+          <p:nvPr/>
+        </p:nvSpPr>
+        <p:spPr>
+          <a:xfrm>
+            <a:off x="11521440" y="6446520"/>
+            <a:ext cx="548640" cy="320040"/>
+          </a:xfrm>
+          <a:prstGeom prst="rect">
+            <a:avLst/>
+          </a:prstGeom>
+          <a:noFill/>
+        </p:spPr>
+        <p:txBody>
+          <a:bodyPr wrap="square">
+            <a:spAutoFit/>
+          </a:bodyPr>
+          <a:lstStyle/>
+          <a:p>
+            <a:pPr algn="r">
+              <a:lnSpc>
+                <a:spcPct val="115000"/>
+              </a:lnSpc>
+            </a:pPr>
+            <a:r>
+              <a:rPr sz="1100" b="0">
+                <a:solidFill>
+                  <a:srgbClr val="CBD5E1"/>
+                </a:solidFill>
+                <a:latin typeface="Calibri"/>
+              </a:rPr>
+              <a:t>14</a:t>
             </a:r>
           </a:p>
         </p:txBody>
@@ -3553,20 +4979,126 @@
       <p:grpSpPr/>
       <p:sp>
         <p:nvSpPr>
-          <p:cNvPr id="2" name="Title 1"/>
-          <p:cNvSpPr>
-            <a:spLocks noGrp="1"/>
-          </p:cNvSpPr>
-          <p:nvPr>
-            <p:ph type="title"/>
-          </p:nvPr>
-        </p:nvSpPr>
-        <p:spPr/>
-        <p:txBody>
-          <a:bodyPr/>
-          <a:lstStyle/>
-          <a:p>
-            <a:r>
+          <p:cNvPr id="2" name="Rectangle 1"/>
+          <p:cNvSpPr/>
+          <p:nvPr/>
+        </p:nvSpPr>
+        <p:spPr>
+          <a:xfrm>
+            <a:off x="0" y="0"/>
+            <a:ext cx="12191695" cy="6858000"/>
+          </a:xfrm>
+          <a:prstGeom prst="rect">
+            <a:avLst/>
+          </a:prstGeom>
+          <a:solidFill>
+            <a:srgbClr val="0F172A"/>
+          </a:solidFill>
+          <a:ln>
+            <a:noFill/>
+          </a:ln>
+          <a:effectLst/>
+        </p:spPr>
+        <p:style>
+          <a:lnRef idx="1">
+            <a:schemeClr val="accent1"/>
+          </a:lnRef>
+          <a:fillRef idx="3">
+            <a:schemeClr val="accent1"/>
+          </a:fillRef>
+          <a:effectRef idx="2">
+            <a:schemeClr val="accent1"/>
+          </a:effectRef>
+          <a:fontRef idx="minor">
+            <a:schemeClr val="lt1"/>
+          </a:fontRef>
+        </p:style>
+        <p:txBody>
+          <a:bodyPr rtlCol="0" anchor="ctr"/>
+          <a:lstStyle/>
+          <a:p>
+            <a:pPr algn="ctr"/>
+          </a:p>
+        </p:txBody>
+      </p:sp>
+      <p:sp>
+        <p:nvSpPr>
+          <p:cNvPr id="3" name="Rectangle 2"/>
+          <p:cNvSpPr/>
+          <p:nvPr/>
+        </p:nvSpPr>
+        <p:spPr>
+          <a:xfrm>
+            <a:off x="0" y="0"/>
+            <a:ext cx="137160" cy="6858000"/>
+          </a:xfrm>
+          <a:prstGeom prst="rect">
+            <a:avLst/>
+          </a:prstGeom>
+          <a:solidFill>
+            <a:srgbClr val="2563EB"/>
+          </a:solidFill>
+          <a:ln>
+            <a:noFill/>
+          </a:ln>
+          <a:effectLst/>
+        </p:spPr>
+        <p:style>
+          <a:lnRef idx="1">
+            <a:schemeClr val="accent1"/>
+          </a:lnRef>
+          <a:fillRef idx="3">
+            <a:schemeClr val="accent1"/>
+          </a:fillRef>
+          <a:effectRef idx="2">
+            <a:schemeClr val="accent1"/>
+          </a:effectRef>
+          <a:fontRef idx="minor">
+            <a:schemeClr val="lt1"/>
+          </a:fontRef>
+        </p:style>
+        <p:txBody>
+          <a:bodyPr rtlCol="0" anchor="ctr"/>
+          <a:lstStyle/>
+          <a:p>
+            <a:pPr algn="ctr"/>
+          </a:p>
+        </p:txBody>
+      </p:sp>
+      <p:sp>
+        <p:nvSpPr>
+          <p:cNvPr id="4" name="TextBox 3"/>
+          <p:cNvSpPr txBox="1"/>
+          <p:nvPr/>
+        </p:nvSpPr>
+        <p:spPr>
+          <a:xfrm>
+            <a:off x="548640" y="320040"/>
+            <a:ext cx="10972800" cy="731520"/>
+          </a:xfrm>
+          <a:prstGeom prst="rect">
+            <a:avLst/>
+          </a:prstGeom>
+          <a:noFill/>
+        </p:spPr>
+        <p:txBody>
+          <a:bodyPr wrap="square">
+            <a:spAutoFit/>
+          </a:bodyPr>
+          <a:lstStyle/>
+          <a:p>
+            <a:pPr algn="l">
+              <a:lnSpc>
+                <a:spcPct val="115000"/>
+              </a:lnSpc>
+            </a:pPr>
+            <a:r>
+              <a:rPr sz="3000" b="1">
+                <a:solidFill>
+                  <a:srgbClr val="FFFFFF"/>
+                </a:solidFill>
+                <a:latin typeface="Calibri"/>
+              </a:rPr>
               <a:t>Conclusion</a:t>
             </a:r>
           </a:p>
@@ -3574,40 +5106,138 @@
       </p:sp>
       <p:sp>
         <p:nvSpPr>
-          <p:cNvPr id="3" name="Content Placeholder 2"/>
-          <p:cNvSpPr>
-            <a:spLocks noGrp="1"/>
-          </p:cNvSpPr>
-          <p:nvPr>
-            <p:ph idx="1"/>
-          </p:nvPr>
-        </p:nvSpPr>
-        <p:spPr/>
-        <p:txBody>
-          <a:bodyPr/>
-          <a:lstStyle/>
-          <a:p>
-            <a:pPr/>
-            <a:r>
-              <a:t>A working, reproducible two-crew CrewAI Flow</a:t>
-            </a:r>
-          </a:p>
-          <a:p>
-            <a:pPr/>
-            <a:r>
-              <a:t>Solves a real hospitality business problem</a:t>
-            </a:r>
-          </a:p>
-          <a:p>
-            <a:pPr/>
-            <a:r>
-              <a:t>Same architecture pattern used by Toto in daily operations</a:t>
-            </a:r>
-          </a:p>
-          <a:p>
-            <a:pPr/>
-            <a:r>
-              <a:t>Repository: github.com/nirwaizman/toto-final-project</a:t>
+          <p:cNvPr id="5" name="TextBox 4"/>
+          <p:cNvSpPr txBox="1"/>
+          <p:nvPr/>
+        </p:nvSpPr>
+        <p:spPr>
+          <a:xfrm>
+            <a:off x="640080" y="1463040"/>
+            <a:ext cx="10789920" cy="4572000"/>
+          </a:xfrm>
+          <a:prstGeom prst="rect">
+            <a:avLst/>
+          </a:prstGeom>
+          <a:noFill/>
+        </p:spPr>
+        <p:txBody>
+          <a:bodyPr wrap="square">
+            <a:spAutoFit/>
+          </a:bodyPr>
+          <a:lstStyle/>
+          <a:p>
+            <a:pPr>
+              <a:lnSpc>
+                <a:spcPct val="130000"/>
+              </a:lnSpc>
+              <a:spcAft>
+                <a:spcPts val="1000"/>
+              </a:spcAft>
+            </a:pPr>
+            <a:r>
+              <a:rPr sz="1800">
+                <a:solidFill>
+                  <a:srgbClr val="CBD5E1"/>
+                </a:solidFill>
+                <a:latin typeface="Calibri"/>
+              </a:rPr>
+              <a:t>●  A working, reproducible two-crew CrewAI Flow — 7 specialized agents total.</a:t>
+            </a:r>
+          </a:p>
+          <a:p>
+            <a:pPr>
+              <a:lnSpc>
+                <a:spcPct val="130000"/>
+              </a:lnSpc>
+              <a:spcAft>
+                <a:spcPts val="1000"/>
+              </a:spcAft>
+            </a:pPr>
+            <a:r>
+              <a:rPr sz="1800">
+                <a:solidFill>
+                  <a:srgbClr val="CBD5E1"/>
+                </a:solidFill>
+                <a:latin typeface="Calibri"/>
+              </a:rPr>
+              <a:t>●  Solves a real hospitality problem: predicting booking cancellation risk to support revenue decisions.</a:t>
+            </a:r>
+          </a:p>
+          <a:p>
+            <a:pPr>
+              <a:lnSpc>
+                <a:spcPct val="130000"/>
+              </a:lnSpc>
+              <a:spcAft>
+                <a:spcPts val="1000"/>
+              </a:spcAft>
+            </a:pPr>
+            <a:r>
+              <a:rPr sz="1800">
+                <a:solidFill>
+                  <a:srgbClr val="CBD5E1"/>
+                </a:solidFill>
+                <a:latin typeface="Calibri"/>
+              </a:rPr>
+              <a:t>●  Full pipeline: raw data → validated contract → engineered features → trained model → live app.</a:t>
+            </a:r>
+          </a:p>
+          <a:p>
+            <a:pPr>
+              <a:lnSpc>
+                <a:spcPct val="130000"/>
+              </a:lnSpc>
+              <a:spcAft>
+                <a:spcPts val="1000"/>
+              </a:spcAft>
+            </a:pPr>
+            <a:r>
+              <a:rPr sz="1800">
+                <a:solidFill>
+                  <a:srgbClr val="CBD5E1"/>
+                </a:solidFill>
+                <a:latin typeface="Calibri"/>
+              </a:rPr>
+              <a:t>●  Same philosophy as Toto: specialized agents, verified handoffs, decision support — not blind automation.</a:t>
+            </a:r>
+          </a:p>
+        </p:txBody>
+      </p:sp>
+      <p:sp>
+        <p:nvSpPr>
+          <p:cNvPr id="6" name="TextBox 5"/>
+          <p:cNvSpPr txBox="1"/>
+          <p:nvPr/>
+        </p:nvSpPr>
+        <p:spPr>
+          <a:xfrm>
+            <a:off x="11521440" y="6446520"/>
+            <a:ext cx="548640" cy="320040"/>
+          </a:xfrm>
+          <a:prstGeom prst="rect">
+            <a:avLst/>
+          </a:prstGeom>
+          <a:noFill/>
+        </p:spPr>
+        <p:txBody>
+          <a:bodyPr wrap="square">
+            <a:spAutoFit/>
+          </a:bodyPr>
+          <a:lstStyle/>
+          <a:p>
+            <a:pPr algn="r">
+              <a:lnSpc>
+                <a:spcPct val="115000"/>
+              </a:lnSpc>
+            </a:pPr>
+            <a:r>
+              <a:rPr sz="1100" b="0">
+                <a:solidFill>
+                  <a:srgbClr val="CBD5E1"/>
+                </a:solidFill>
+                <a:latin typeface="Calibri"/>
+              </a:rPr>
+              <a:t>15</a:t>
             </a:r>
           </a:p>
         </p:txBody>
@@ -3632,55 +5262,360 @@
       <p:grpSpPr/>
       <p:sp>
         <p:nvSpPr>
-          <p:cNvPr id="2" name="Title 1"/>
-          <p:cNvSpPr>
-            <a:spLocks noGrp="1"/>
-          </p:cNvSpPr>
-          <p:nvPr>
-            <p:ph type="title"/>
-          </p:nvPr>
-        </p:nvSpPr>
-        <p:spPr/>
-        <p:txBody>
-          <a:bodyPr/>
-          <a:lstStyle/>
-          <a:p>
-            <a:r>
-              <a:t>Toto — Industry-Simulated AI Product Workflow</a:t>
-            </a:r>
-          </a:p>
-        </p:txBody>
-      </p:sp>
-      <p:sp>
-        <p:nvSpPr>
-          <p:cNvPr id="3" name="Content Placeholder 2"/>
-          <p:cNvSpPr>
-            <a:spLocks noGrp="1"/>
-          </p:cNvSpPr>
-          <p:nvPr>
-            <p:ph idx="1"/>
-          </p:nvPr>
-        </p:nvSpPr>
-        <p:spPr/>
-        <p:txBody>
-          <a:bodyPr/>
-          <a:lstStyle/>
-          <a:p>
-            <a:pPr/>
-            <a:r>
-              <a:t>Final Project — AI Development &amp; Collaboration Course</a:t>
-            </a:r>
-          </a:p>
-          <a:p>
-            <a:pPr/>
-            <a:r>
-              <a:t>Nir Waizman</a:t>
-            </a:r>
-          </a:p>
-          <a:p>
-            <a:pPr/>
-            <a:r>
-              <a:t>CrewAI · Python · GitHub · Streamlit</a:t>
+          <p:cNvPr id="2" name="Rectangle 1"/>
+          <p:cNvSpPr/>
+          <p:nvPr/>
+        </p:nvSpPr>
+        <p:spPr>
+          <a:xfrm>
+            <a:off x="0" y="0"/>
+            <a:ext cx="12191695" cy="6858000"/>
+          </a:xfrm>
+          <a:prstGeom prst="rect">
+            <a:avLst/>
+          </a:prstGeom>
+          <a:solidFill>
+            <a:srgbClr val="0F172A"/>
+          </a:solidFill>
+          <a:ln>
+            <a:noFill/>
+          </a:ln>
+          <a:effectLst/>
+        </p:spPr>
+        <p:style>
+          <a:lnRef idx="1">
+            <a:schemeClr val="accent1"/>
+          </a:lnRef>
+          <a:fillRef idx="3">
+            <a:schemeClr val="accent1"/>
+          </a:fillRef>
+          <a:effectRef idx="2">
+            <a:schemeClr val="accent1"/>
+          </a:effectRef>
+          <a:fontRef idx="minor">
+            <a:schemeClr val="lt1"/>
+          </a:fontRef>
+        </p:style>
+        <p:txBody>
+          <a:bodyPr rtlCol="0" anchor="ctr"/>
+          <a:lstStyle/>
+          <a:p>
+            <a:pPr algn="ctr"/>
+          </a:p>
+        </p:txBody>
+      </p:sp>
+      <p:sp>
+        <p:nvSpPr>
+          <p:cNvPr id="3" name="Rectangle 2"/>
+          <p:cNvSpPr/>
+          <p:nvPr/>
+        </p:nvSpPr>
+        <p:spPr>
+          <a:xfrm>
+            <a:off x="0" y="0"/>
+            <a:ext cx="137160" cy="6858000"/>
+          </a:xfrm>
+          <a:prstGeom prst="rect">
+            <a:avLst/>
+          </a:prstGeom>
+          <a:solidFill>
+            <a:srgbClr val="F97316"/>
+          </a:solidFill>
+          <a:ln>
+            <a:noFill/>
+          </a:ln>
+          <a:effectLst/>
+        </p:spPr>
+        <p:style>
+          <a:lnRef idx="1">
+            <a:schemeClr val="accent1"/>
+          </a:lnRef>
+          <a:fillRef idx="3">
+            <a:schemeClr val="accent1"/>
+          </a:fillRef>
+          <a:effectRef idx="2">
+            <a:schemeClr val="accent1"/>
+          </a:effectRef>
+          <a:fontRef idx="minor">
+            <a:schemeClr val="lt1"/>
+          </a:fontRef>
+        </p:style>
+        <p:txBody>
+          <a:bodyPr rtlCol="0" anchor="ctr"/>
+          <a:lstStyle/>
+          <a:p>
+            <a:pPr algn="ctr"/>
+          </a:p>
+        </p:txBody>
+      </p:sp>
+      <p:sp>
+        <p:nvSpPr>
+          <p:cNvPr id="4" name="TextBox 3"/>
+          <p:cNvSpPr txBox="1"/>
+          <p:nvPr/>
+        </p:nvSpPr>
+        <p:spPr>
+          <a:xfrm>
+            <a:off x="548640" y="320040"/>
+            <a:ext cx="10972800" cy="731520"/>
+          </a:xfrm>
+          <a:prstGeom prst="rect">
+            <a:avLst/>
+          </a:prstGeom>
+          <a:noFill/>
+        </p:spPr>
+        <p:txBody>
+          <a:bodyPr wrap="square">
+            <a:spAutoFit/>
+          </a:bodyPr>
+          <a:lstStyle/>
+          <a:p>
+            <a:pPr algn="l">
+              <a:lnSpc>
+                <a:spcPct val="115000"/>
+              </a:lnSpc>
+            </a:pPr>
+            <a:r>
+              <a:rPr sz="3000" b="1">
+                <a:solidFill>
+                  <a:srgbClr val="FFFFFF"/>
+                </a:solidFill>
+                <a:latin typeface="Calibri"/>
+              </a:rPr>
+              <a:t>Agenda</a:t>
+            </a:r>
+          </a:p>
+        </p:txBody>
+      </p:sp>
+      <p:sp>
+        <p:nvSpPr>
+          <p:cNvPr id="5" name="TextBox 4"/>
+          <p:cNvSpPr txBox="1"/>
+          <p:nvPr/>
+        </p:nvSpPr>
+        <p:spPr>
+          <a:xfrm>
+            <a:off x="731520" y="1463040"/>
+            <a:ext cx="10515600" cy="4572000"/>
+          </a:xfrm>
+          <a:prstGeom prst="rect">
+            <a:avLst/>
+          </a:prstGeom>
+          <a:noFill/>
+        </p:spPr>
+        <p:txBody>
+          <a:bodyPr wrap="square">
+            <a:spAutoFit/>
+          </a:bodyPr>
+          <a:lstStyle/>
+          <a:p>
+            <a:pPr>
+              <a:lnSpc>
+                <a:spcPct val="130000"/>
+              </a:lnSpc>
+              <a:spcAft>
+                <a:spcPts val="1000"/>
+              </a:spcAft>
+            </a:pPr>
+            <a:r>
+              <a:rPr sz="1800">
+                <a:solidFill>
+                  <a:srgbClr val="CBD5E1"/>
+                </a:solidFill>
+                <a:latin typeface="Calibri"/>
+              </a:rPr>
+              <a:t>●  Business Background &amp; the Problem</a:t>
+            </a:r>
+          </a:p>
+          <a:p>
+            <a:pPr>
+              <a:lnSpc>
+                <a:spcPct val="130000"/>
+              </a:lnSpc>
+              <a:spcAft>
+                <a:spcPts val="1000"/>
+              </a:spcAft>
+            </a:pPr>
+            <a:r>
+              <a:rPr sz="1800">
+                <a:solidFill>
+                  <a:srgbClr val="CBD5E1"/>
+                </a:solidFill>
+                <a:latin typeface="Calibri"/>
+              </a:rPr>
+              <a:t>●  The Concept — meet Toto</a:t>
+            </a:r>
+          </a:p>
+          <a:p>
+            <a:pPr>
+              <a:lnSpc>
+                <a:spcPct val="130000"/>
+              </a:lnSpc>
+              <a:spcAft>
+                <a:spcPts val="1000"/>
+              </a:spcAft>
+            </a:pPr>
+            <a:r>
+              <a:rPr sz="1800">
+                <a:solidFill>
+                  <a:srgbClr val="CBD5E1"/>
+                </a:solidFill>
+                <a:latin typeface="Calibri"/>
+              </a:rPr>
+              <a:t>●  High-Level Architecture (2 Crews + Flow)</a:t>
+            </a:r>
+          </a:p>
+          <a:p>
+            <a:pPr>
+              <a:lnSpc>
+                <a:spcPct val="130000"/>
+              </a:lnSpc>
+              <a:spcAft>
+                <a:spcPts val="1000"/>
+              </a:spcAft>
+            </a:pPr>
+            <a:r>
+              <a:rPr sz="1800">
+                <a:solidFill>
+                  <a:srgbClr val="CBD5E1"/>
+                </a:solidFill>
+                <a:latin typeface="Calibri"/>
+              </a:rPr>
+              <a:t>●  Dataset &amp; EDA</a:t>
+            </a:r>
+          </a:p>
+          <a:p>
+            <a:pPr>
+              <a:lnSpc>
+                <a:spcPct val="130000"/>
+              </a:lnSpc>
+              <a:spcAft>
+                <a:spcPts val="1000"/>
+              </a:spcAft>
+            </a:pPr>
+            <a:r>
+              <a:rPr sz="1800">
+                <a:solidFill>
+                  <a:srgbClr val="CBD5E1"/>
+                </a:solidFill>
+                <a:latin typeface="Calibri"/>
+              </a:rPr>
+              <a:t>●  Crew 1 — Data Analyst (4 agents)</a:t>
+            </a:r>
+          </a:p>
+          <a:p>
+            <a:pPr>
+              <a:lnSpc>
+                <a:spcPct val="130000"/>
+              </a:lnSpc>
+              <a:spcAft>
+                <a:spcPts val="1000"/>
+              </a:spcAft>
+            </a:pPr>
+            <a:r>
+              <a:rPr sz="1800">
+                <a:solidFill>
+                  <a:srgbClr val="CBD5E1"/>
+                </a:solidFill>
+                <a:latin typeface="Calibri"/>
+              </a:rPr>
+              <a:t>●  Crew 2 — Data Scientist (3 agents)</a:t>
+            </a:r>
+          </a:p>
+          <a:p>
+            <a:pPr>
+              <a:lnSpc>
+                <a:spcPct val="130000"/>
+              </a:lnSpc>
+              <a:spcAft>
+                <a:spcPts val="1000"/>
+              </a:spcAft>
+            </a:pPr>
+            <a:r>
+              <a:rPr sz="1800">
+                <a:solidFill>
+                  <a:srgbClr val="CBD5E1"/>
+                </a:solidFill>
+                <a:latin typeface="Calibri"/>
+              </a:rPr>
+              <a:t>●  Model Results &amp; Model Card</a:t>
+            </a:r>
+          </a:p>
+          <a:p>
+            <a:pPr>
+              <a:lnSpc>
+                <a:spcPct val="130000"/>
+              </a:lnSpc>
+              <a:spcAft>
+                <a:spcPts val="1000"/>
+              </a:spcAft>
+            </a:pPr>
+            <a:r>
+              <a:rPr sz="1800">
+                <a:solidFill>
+                  <a:srgbClr val="CBD5E1"/>
+                </a:solidFill>
+                <a:latin typeface="Calibri"/>
+              </a:rPr>
+              <a:t>●  Streamlit App Demo</a:t>
+            </a:r>
+          </a:p>
+          <a:p>
+            <a:pPr>
+              <a:lnSpc>
+                <a:spcPct val="130000"/>
+              </a:lnSpc>
+              <a:spcAft>
+                <a:spcPts val="1000"/>
+              </a:spcAft>
+            </a:pPr>
+            <a:r>
+              <a:rPr sz="1800">
+                <a:solidFill>
+                  <a:srgbClr val="CBD5E1"/>
+                </a:solidFill>
+                <a:latin typeface="Calibri"/>
+              </a:rPr>
+              <a:t>●  Tech Stack &amp; Conclusion</a:t>
+            </a:r>
+          </a:p>
+        </p:txBody>
+      </p:sp>
+      <p:sp>
+        <p:nvSpPr>
+          <p:cNvPr id="6" name="TextBox 5"/>
+          <p:cNvSpPr txBox="1"/>
+          <p:nvPr/>
+        </p:nvSpPr>
+        <p:spPr>
+          <a:xfrm>
+            <a:off x="11521440" y="6446520"/>
+            <a:ext cx="548640" cy="320040"/>
+          </a:xfrm>
+          <a:prstGeom prst="rect">
+            <a:avLst/>
+          </a:prstGeom>
+          <a:noFill/>
+        </p:spPr>
+        <p:txBody>
+          <a:bodyPr wrap="square">
+            <a:spAutoFit/>
+          </a:bodyPr>
+          <a:lstStyle/>
+          <a:p>
+            <a:pPr algn="r">
+              <a:lnSpc>
+                <a:spcPct val="115000"/>
+              </a:lnSpc>
+            </a:pPr>
+            <a:r>
+              <a:rPr sz="1100" b="0">
+                <a:solidFill>
+                  <a:srgbClr val="CBD5E1"/>
+                </a:solidFill>
+                <a:latin typeface="Calibri"/>
+              </a:rPr>
+              <a:t>2</a:t>
             </a:r>
           </a:p>
         </p:txBody>
@@ -3705,20 +5640,126 @@
       <p:grpSpPr/>
       <p:sp>
         <p:nvSpPr>
-          <p:cNvPr id="2" name="Title 1"/>
-          <p:cNvSpPr>
-            <a:spLocks noGrp="1"/>
-          </p:cNvSpPr>
-          <p:nvPr>
-            <p:ph type="title"/>
-          </p:nvPr>
-        </p:nvSpPr>
-        <p:spPr/>
-        <p:txBody>
-          <a:bodyPr/>
-          <a:lstStyle/>
-          <a:p>
-            <a:r>
+          <p:cNvPr id="2" name="Rectangle 1"/>
+          <p:cNvSpPr/>
+          <p:nvPr/>
+        </p:nvSpPr>
+        <p:spPr>
+          <a:xfrm>
+            <a:off x="0" y="0"/>
+            <a:ext cx="12191695" cy="6858000"/>
+          </a:xfrm>
+          <a:prstGeom prst="rect">
+            <a:avLst/>
+          </a:prstGeom>
+          <a:solidFill>
+            <a:srgbClr val="0F172A"/>
+          </a:solidFill>
+          <a:ln>
+            <a:noFill/>
+          </a:ln>
+          <a:effectLst/>
+        </p:spPr>
+        <p:style>
+          <a:lnRef idx="1">
+            <a:schemeClr val="accent1"/>
+          </a:lnRef>
+          <a:fillRef idx="3">
+            <a:schemeClr val="accent1"/>
+          </a:fillRef>
+          <a:effectRef idx="2">
+            <a:schemeClr val="accent1"/>
+          </a:effectRef>
+          <a:fontRef idx="minor">
+            <a:schemeClr val="lt1"/>
+          </a:fontRef>
+        </p:style>
+        <p:txBody>
+          <a:bodyPr rtlCol="0" anchor="ctr"/>
+          <a:lstStyle/>
+          <a:p>
+            <a:pPr algn="ctr"/>
+          </a:p>
+        </p:txBody>
+      </p:sp>
+      <p:sp>
+        <p:nvSpPr>
+          <p:cNvPr id="3" name="Rectangle 2"/>
+          <p:cNvSpPr/>
+          <p:nvPr/>
+        </p:nvSpPr>
+        <p:spPr>
+          <a:xfrm>
+            <a:off x="0" y="0"/>
+            <a:ext cx="137160" cy="6858000"/>
+          </a:xfrm>
+          <a:prstGeom prst="rect">
+            <a:avLst/>
+          </a:prstGeom>
+          <a:solidFill>
+            <a:srgbClr val="F97316"/>
+          </a:solidFill>
+          <a:ln>
+            <a:noFill/>
+          </a:ln>
+          <a:effectLst/>
+        </p:spPr>
+        <p:style>
+          <a:lnRef idx="1">
+            <a:schemeClr val="accent1"/>
+          </a:lnRef>
+          <a:fillRef idx="3">
+            <a:schemeClr val="accent1"/>
+          </a:fillRef>
+          <a:effectRef idx="2">
+            <a:schemeClr val="accent1"/>
+          </a:effectRef>
+          <a:fontRef idx="minor">
+            <a:schemeClr val="lt1"/>
+          </a:fontRef>
+        </p:style>
+        <p:txBody>
+          <a:bodyPr rtlCol="0" anchor="ctr"/>
+          <a:lstStyle/>
+          <a:p>
+            <a:pPr algn="ctr"/>
+          </a:p>
+        </p:txBody>
+      </p:sp>
+      <p:sp>
+        <p:nvSpPr>
+          <p:cNvPr id="4" name="TextBox 3"/>
+          <p:cNvSpPr txBox="1"/>
+          <p:nvPr/>
+        </p:nvSpPr>
+        <p:spPr>
+          <a:xfrm>
+            <a:off x="548640" y="320040"/>
+            <a:ext cx="10972800" cy="731520"/>
+          </a:xfrm>
+          <a:prstGeom prst="rect">
+            <a:avLst/>
+          </a:prstGeom>
+          <a:noFill/>
+        </p:spPr>
+        <p:txBody>
+          <a:bodyPr wrap="square">
+            <a:spAutoFit/>
+          </a:bodyPr>
+          <a:lstStyle/>
+          <a:p>
+            <a:pPr algn="l">
+              <a:lnSpc>
+                <a:spcPct val="115000"/>
+              </a:lnSpc>
+            </a:pPr>
+            <a:r>
+              <a:rPr sz="3000" b="1">
+                <a:solidFill>
+                  <a:srgbClr val="FFFFFF"/>
+                </a:solidFill>
+                <a:latin typeface="Calibri"/>
+              </a:rPr>
               <a:t>Business Background</a:t>
             </a:r>
           </a:p>
@@ -3726,46 +5767,247 @@
       </p:sp>
       <p:sp>
         <p:nvSpPr>
-          <p:cNvPr id="3" name="Content Placeholder 2"/>
-          <p:cNvSpPr>
-            <a:spLocks noGrp="1"/>
-          </p:cNvSpPr>
-          <p:nvPr>
-            <p:ph idx="1"/>
-          </p:nvPr>
-        </p:nvSpPr>
-        <p:spPr/>
-        <p:txBody>
-          <a:bodyPr/>
-          <a:lstStyle/>
-          <a:p>
-            <a:pPr/>
-            <a:r>
-              <a:t>A hospitality group operates multiple hotels (inspired by real operations: Hotel Eilat, Theodor Tel Aviv)</a:t>
-            </a:r>
-          </a:p>
-          <a:p>
-            <a:pPr/>
-            <a:r>
-              <a:t>Management needs two perspectives on booking data:</a:t>
-            </a:r>
-          </a:p>
-          <a:p>
-            <a:pPr lvl="1"/>
-            <a:r>
-              <a:t>Descriptive: "What has happened in our bookings?"</a:t>
-            </a:r>
-          </a:p>
-          <a:p>
-            <a:pPr lvl="1"/>
-            <a:r>
-              <a:t>Predictive: "Which bookings are likely to cancel?"</a:t>
-            </a:r>
-          </a:p>
-          <a:p>
-            <a:pPr/>
-            <a:r>
-              <a:t>This project simulates a real AI product team solving both, using two collaborating CrewAI crews</a:t>
+          <p:cNvPr id="5" name="TextBox 4"/>
+          <p:cNvSpPr txBox="1"/>
+          <p:nvPr/>
+        </p:nvSpPr>
+        <p:spPr>
+          <a:xfrm>
+            <a:off x="640080" y="1463040"/>
+            <a:ext cx="5669280" cy="4754880"/>
+          </a:xfrm>
+          <a:prstGeom prst="rect">
+            <a:avLst/>
+          </a:prstGeom>
+          <a:noFill/>
+        </p:spPr>
+        <p:txBody>
+          <a:bodyPr wrap="square">
+            <a:spAutoFit/>
+          </a:bodyPr>
+          <a:lstStyle/>
+          <a:p>
+            <a:pPr>
+              <a:lnSpc>
+                <a:spcPct val="130000"/>
+              </a:lnSpc>
+              <a:spcAft>
+                <a:spcPts val="1000"/>
+              </a:spcAft>
+            </a:pPr>
+            <a:r>
+              <a:rPr sz="1600">
+                <a:solidFill>
+                  <a:srgbClr val="CBD5E1"/>
+                </a:solidFill>
+                <a:latin typeface="Calibri"/>
+              </a:rPr>
+              <a:t>●  A hospitality group operates multiple hotels (inspired by real operations: boutique hotel in Eilat + city-center hotel in Tel Aviv).</a:t>
+            </a:r>
+          </a:p>
+          <a:p>
+            <a:pPr>
+              <a:lnSpc>
+                <a:spcPct val="130000"/>
+              </a:lnSpc>
+              <a:spcAft>
+                <a:spcPts val="1000"/>
+              </a:spcAft>
+            </a:pPr>
+            <a:r>
+              <a:rPr sz="1600">
+                <a:solidFill>
+                  <a:srgbClr val="CBD5E1"/>
+                </a:solidFill>
+                <a:latin typeface="Calibri"/>
+              </a:rPr>
+              <a:t>●  Booking cancellations create major revenue-management risk: unsold rooms, wasted staffing, inaccurate forecasts.</a:t>
+            </a:r>
+          </a:p>
+          <a:p>
+            <a:pPr>
+              <a:lnSpc>
+                <a:spcPct val="130000"/>
+              </a:lnSpc>
+              <a:spcAft>
+                <a:spcPts val="1000"/>
+              </a:spcAft>
+            </a:pPr>
+            <a:r>
+              <a:rPr sz="1600">
+                <a:solidFill>
+                  <a:srgbClr val="CBD5E1"/>
+                </a:solidFill>
+                <a:latin typeface="Calibri"/>
+              </a:rPr>
+              <a:t>●  The business needs a data-driven way to flag high-risk bookings early — before check-in — to enable smarter overbooking and deposit policy.</a:t>
+            </a:r>
+          </a:p>
+          <a:p>
+            <a:pPr>
+              <a:lnSpc>
+                <a:spcPct val="130000"/>
+              </a:lnSpc>
+              <a:spcAft>
+                <a:spcPts val="1000"/>
+              </a:spcAft>
+            </a:pPr>
+            <a:r>
+              <a:rPr sz="1600">
+                <a:solidFill>
+                  <a:srgbClr val="CBD5E1"/>
+                </a:solidFill>
+                <a:latin typeface="Calibri"/>
+              </a:rPr>
+              <a:t>●  Goal: build an end-to-end, reproducible AI pipeline that ingests booking data, extracts insights, and predicts cancellation risk.</a:t>
+            </a:r>
+          </a:p>
+        </p:txBody>
+      </p:sp>
+      <p:sp>
+        <p:nvSpPr>
+          <p:cNvPr id="6" name="Rounded Rectangle 5"/>
+          <p:cNvSpPr/>
+          <p:nvPr/>
+        </p:nvSpPr>
+        <p:spPr>
+          <a:xfrm>
+            <a:off x="6583680" y="1463040"/>
+            <a:ext cx="4937760" cy="4800600"/>
+          </a:xfrm>
+          <a:prstGeom prst="roundRect">
+            <a:avLst/>
+          </a:prstGeom>
+          <a:solidFill>
+            <a:srgbClr val="1E293B"/>
+          </a:solidFill>
+          <a:ln w="12700">
+            <a:solidFill>
+              <a:srgbClr val="334155"/>
+            </a:solidFill>
+          </a:ln>
+          <a:effectLst/>
+        </p:spPr>
+        <p:style>
+          <a:lnRef idx="1">
+            <a:schemeClr val="accent1"/>
+          </a:lnRef>
+          <a:fillRef idx="3">
+            <a:schemeClr val="accent1"/>
+          </a:fillRef>
+          <a:effectRef idx="2">
+            <a:schemeClr val="accent1"/>
+          </a:effectRef>
+          <a:fontRef idx="minor">
+            <a:schemeClr val="lt1"/>
+          </a:fontRef>
+        </p:style>
+        <p:txBody>
+          <a:bodyPr rtlCol="0" anchor="ctr"/>
+          <a:lstStyle/>
+          <a:p>
+            <a:pPr algn="ctr"/>
+          </a:p>
+        </p:txBody>
+      </p:sp>
+      <p:pic>
+        <p:nvPicPr>
+          <p:cNvPr id="7" name="Picture 6" descr="class_balance.png"/>
+          <p:cNvPicPr>
+            <a:picLocks noChangeAspect="1"/>
+          </p:cNvPicPr>
+          <p:nvPr/>
+        </p:nvPicPr>
+        <p:blipFill>
+          <a:blip r:embed="rId2"/>
+          <a:stretch>
+            <a:fillRect/>
+          </a:stretch>
+        </p:blipFill>
+        <p:spPr>
+          <a:xfrm>
+            <a:off x="6675120" y="1554480"/>
+            <a:ext cx="4297680" cy="4297680"/>
+          </a:xfrm>
+          <a:prstGeom prst="rect">
+            <a:avLst/>
+          </a:prstGeom>
+        </p:spPr>
+      </p:pic>
+      <p:sp>
+        <p:nvSpPr>
+          <p:cNvPr id="8" name="TextBox 7"/>
+          <p:cNvSpPr txBox="1"/>
+          <p:nvPr/>
+        </p:nvSpPr>
+        <p:spPr>
+          <a:xfrm>
+            <a:off x="6583680" y="5897880"/>
+            <a:ext cx="4937760" cy="365760"/>
+          </a:xfrm>
+          <a:prstGeom prst="rect">
+            <a:avLst/>
+          </a:prstGeom>
+          <a:noFill/>
+        </p:spPr>
+        <p:txBody>
+          <a:bodyPr wrap="square">
+            <a:spAutoFit/>
+          </a:bodyPr>
+          <a:lstStyle/>
+          <a:p>
+            <a:pPr algn="ctr">
+              <a:lnSpc>
+                <a:spcPct val="115000"/>
+              </a:lnSpc>
+            </a:pPr>
+            <a:r>
+              <a:rPr sz="1100" b="0">
+                <a:solidFill>
+                  <a:srgbClr val="CBD5E1"/>
+                </a:solidFill>
+                <a:latin typeface="Calibri"/>
+              </a:rPr>
+              <a:t>119,390 real hotel bookings (Portugal, 2015–2017)</a:t>
+            </a:r>
+          </a:p>
+        </p:txBody>
+      </p:sp>
+      <p:sp>
+        <p:nvSpPr>
+          <p:cNvPr id="9" name="TextBox 8"/>
+          <p:cNvSpPr txBox="1"/>
+          <p:nvPr/>
+        </p:nvSpPr>
+        <p:spPr>
+          <a:xfrm>
+            <a:off x="11521440" y="6446520"/>
+            <a:ext cx="548640" cy="320040"/>
+          </a:xfrm>
+          <a:prstGeom prst="rect">
+            <a:avLst/>
+          </a:prstGeom>
+          <a:noFill/>
+        </p:spPr>
+        <p:txBody>
+          <a:bodyPr wrap="square">
+            <a:spAutoFit/>
+          </a:bodyPr>
+          <a:lstStyle/>
+          <a:p>
+            <a:pPr algn="r">
+              <a:lnSpc>
+                <a:spcPct val="115000"/>
+              </a:lnSpc>
+            </a:pPr>
+            <a:r>
+              <a:rPr sz="1100" b="0">
+                <a:solidFill>
+                  <a:srgbClr val="CBD5E1"/>
+                </a:solidFill>
+                <a:latin typeface="Calibri"/>
+              </a:rPr>
+              <a:t>3</a:t>
             </a:r>
           </a:p>
         </p:txBody>
@@ -3790,20 +6032,126 @@
       <p:grpSpPr/>
       <p:sp>
         <p:nvSpPr>
-          <p:cNvPr id="2" name="Title 1"/>
-          <p:cNvSpPr>
-            <a:spLocks noGrp="1"/>
-          </p:cNvSpPr>
-          <p:nvPr>
-            <p:ph type="title"/>
-          </p:nvPr>
-        </p:nvSpPr>
-        <p:spPr/>
-        <p:txBody>
-          <a:bodyPr/>
-          <a:lstStyle/>
-          <a:p>
-            <a:r>
+          <p:cNvPr id="2" name="Rectangle 1"/>
+          <p:cNvSpPr/>
+          <p:nvPr/>
+        </p:nvSpPr>
+        <p:spPr>
+          <a:xfrm>
+            <a:off x="0" y="0"/>
+            <a:ext cx="12191695" cy="6858000"/>
+          </a:xfrm>
+          <a:prstGeom prst="rect">
+            <a:avLst/>
+          </a:prstGeom>
+          <a:solidFill>
+            <a:srgbClr val="0F172A"/>
+          </a:solidFill>
+          <a:ln>
+            <a:noFill/>
+          </a:ln>
+          <a:effectLst/>
+        </p:spPr>
+        <p:style>
+          <a:lnRef idx="1">
+            <a:schemeClr val="accent1"/>
+          </a:lnRef>
+          <a:fillRef idx="3">
+            <a:schemeClr val="accent1"/>
+          </a:fillRef>
+          <a:effectRef idx="2">
+            <a:schemeClr val="accent1"/>
+          </a:effectRef>
+          <a:fontRef idx="minor">
+            <a:schemeClr val="lt1"/>
+          </a:fontRef>
+        </p:style>
+        <p:txBody>
+          <a:bodyPr rtlCol="0" anchor="ctr"/>
+          <a:lstStyle/>
+          <a:p>
+            <a:pPr algn="ctr"/>
+          </a:p>
+        </p:txBody>
+      </p:sp>
+      <p:sp>
+        <p:nvSpPr>
+          <p:cNvPr id="3" name="Rectangle 2"/>
+          <p:cNvSpPr/>
+          <p:nvPr/>
+        </p:nvSpPr>
+        <p:spPr>
+          <a:xfrm>
+            <a:off x="0" y="0"/>
+            <a:ext cx="137160" cy="6858000"/>
+          </a:xfrm>
+          <a:prstGeom prst="rect">
+            <a:avLst/>
+          </a:prstGeom>
+          <a:solidFill>
+            <a:srgbClr val="10B981"/>
+          </a:solidFill>
+          <a:ln>
+            <a:noFill/>
+          </a:ln>
+          <a:effectLst/>
+        </p:spPr>
+        <p:style>
+          <a:lnRef idx="1">
+            <a:schemeClr val="accent1"/>
+          </a:lnRef>
+          <a:fillRef idx="3">
+            <a:schemeClr val="accent1"/>
+          </a:fillRef>
+          <a:effectRef idx="2">
+            <a:schemeClr val="accent1"/>
+          </a:effectRef>
+          <a:fontRef idx="minor">
+            <a:schemeClr val="lt1"/>
+          </a:fontRef>
+        </p:style>
+        <p:txBody>
+          <a:bodyPr rtlCol="0" anchor="ctr"/>
+          <a:lstStyle/>
+          <a:p>
+            <a:pPr algn="ctr"/>
+          </a:p>
+        </p:txBody>
+      </p:sp>
+      <p:sp>
+        <p:nvSpPr>
+          <p:cNvPr id="4" name="TextBox 3"/>
+          <p:cNvSpPr txBox="1"/>
+          <p:nvPr/>
+        </p:nvSpPr>
+        <p:spPr>
+          <a:xfrm>
+            <a:off x="548640" y="320040"/>
+            <a:ext cx="10972800" cy="731520"/>
+          </a:xfrm>
+          <a:prstGeom prst="rect">
+            <a:avLst/>
+          </a:prstGeom>
+          <a:noFill/>
+        </p:spPr>
+        <p:txBody>
+          <a:bodyPr wrap="square">
+            <a:spAutoFit/>
+          </a:bodyPr>
+          <a:lstStyle/>
+          <a:p>
+            <a:pPr algn="l">
+              <a:lnSpc>
+                <a:spcPct val="115000"/>
+              </a:lnSpc>
+            </a:pPr>
+            <a:r>
+              <a:rPr sz="3000" b="1">
+                <a:solidFill>
+                  <a:srgbClr val="FFFFFF"/>
+                </a:solidFill>
+                <a:latin typeface="Calibri"/>
+              </a:rPr>
               <a:t>The Concept — "Toto"</a:t>
             </a:r>
           </a:p>
@@ -3811,40 +6159,157 @@
       </p:sp>
       <p:sp>
         <p:nvSpPr>
-          <p:cNvPr id="3" name="Content Placeholder 2"/>
-          <p:cNvSpPr>
-            <a:spLocks noGrp="1"/>
-          </p:cNvSpPr>
-          <p:nvPr>
-            <p:ph idx="1"/>
-          </p:nvPr>
-        </p:nvSpPr>
-        <p:spPr/>
-        <p:txBody>
-          <a:bodyPr/>
-          <a:lstStyle/>
-          <a:p>
-            <a:pPr/>
-            <a:r>
-              <a:t>Inspired by Toto: a real, daily-operating personal AI assistant</a:t>
-            </a:r>
-          </a:p>
-          <a:p>
-            <a:pPr/>
-            <a:r>
-              <a:t>Same core idea — an AI agent that ingests data, reasons, acts, and reports</a:t>
-            </a:r>
-          </a:p>
-          <a:p>
-            <a:pPr/>
-            <a:r>
-              <a:t>Reimagined here as a two-crew hospitality analytics pipeline</a:t>
-            </a:r>
-          </a:p>
-          <a:p>
-            <a:pPr/>
-            <a:r>
-              <a:t>Proves the multi-agent collaboration pattern on a real, high-value business problem</a:t>
+          <p:cNvPr id="5" name="TextBox 4"/>
+          <p:cNvSpPr txBox="1"/>
+          <p:nvPr/>
+        </p:nvSpPr>
+        <p:spPr>
+          <a:xfrm>
+            <a:off x="640080" y="1463040"/>
+            <a:ext cx="10698480" cy="4572000"/>
+          </a:xfrm>
+          <a:prstGeom prst="rect">
+            <a:avLst/>
+          </a:prstGeom>
+          <a:noFill/>
+        </p:spPr>
+        <p:txBody>
+          <a:bodyPr wrap="square">
+            <a:spAutoFit/>
+          </a:bodyPr>
+          <a:lstStyle/>
+          <a:p>
+            <a:pPr>
+              <a:lnSpc>
+                <a:spcPct val="130000"/>
+              </a:lnSpc>
+              <a:spcAft>
+                <a:spcPts val="1000"/>
+              </a:spcAft>
+            </a:pPr>
+            <a:r>
+              <a:rPr sz="1700">
+                <a:solidFill>
+                  <a:srgbClr val="CBD5E1"/>
+                </a:solidFill>
+                <a:latin typeface="Calibri"/>
+              </a:rPr>
+              <a:t>●  Inspired by Toto: a real, daily-operating personal AI assistant already handling legal tracking, banking, family logistics and hotel operations for its user.</a:t>
+            </a:r>
+          </a:p>
+          <a:p>
+            <a:pPr>
+              <a:lnSpc>
+                <a:spcPct val="130000"/>
+              </a:lnSpc>
+              <a:spcAft>
+                <a:spcPts val="1000"/>
+              </a:spcAft>
+            </a:pPr>
+            <a:r>
+              <a:rPr sz="1700">
+                <a:solidFill>
+                  <a:srgbClr val="CBD5E1"/>
+                </a:solidFill>
+                <a:latin typeface="Calibri"/>
+              </a:rPr>
+              <a:t>●  This project simulates the same philosophy at industry scale: specialized AI agents, each with one clear job, collaborating through defined handoffs.</a:t>
+            </a:r>
+          </a:p>
+          <a:p>
+            <a:pPr>
+              <a:lnSpc>
+                <a:spcPct val="130000"/>
+              </a:lnSpc>
+              <a:spcAft>
+                <a:spcPts val="1000"/>
+              </a:spcAft>
+            </a:pPr>
+            <a:r>
+              <a:rPr sz="1700">
+                <a:solidFill>
+                  <a:srgbClr val="CBD5E1"/>
+                </a:solidFill>
+                <a:latin typeface="Calibri"/>
+              </a:rPr>
+              <a:t>●  Crew 1 (Data Analyst) mirrors how Toto ingests raw, messy real-world information and turns it into structured, trustworthy insight.</a:t>
+            </a:r>
+          </a:p>
+          <a:p>
+            <a:pPr>
+              <a:lnSpc>
+                <a:spcPct val="130000"/>
+              </a:lnSpc>
+              <a:spcAft>
+                <a:spcPts val="1000"/>
+              </a:spcAft>
+            </a:pPr>
+            <a:r>
+              <a:rPr sz="1700">
+                <a:solidFill>
+                  <a:srgbClr val="CBD5E1"/>
+                </a:solidFill>
+                <a:latin typeface="Calibri"/>
+              </a:rPr>
+              <a:t>●  Crew 2 (Data Scientist) mirrors how Toto turns insight into a decision-support tool — a live prediction, not just a report.</a:t>
+            </a:r>
+          </a:p>
+          <a:p>
+            <a:pPr>
+              <a:lnSpc>
+                <a:spcPct val="130000"/>
+              </a:lnSpc>
+              <a:spcAft>
+                <a:spcPts val="1000"/>
+              </a:spcAft>
+            </a:pPr>
+            <a:r>
+              <a:rPr sz="1700">
+                <a:solidFill>
+                  <a:srgbClr val="CBD5E1"/>
+                </a:solidFill>
+                <a:latin typeface="Calibri"/>
+              </a:rPr>
+              <a:t>●  The CrewAI Flow enforces validation gates between crews — just like Toto never acts on unverified data.</a:t>
+            </a:r>
+          </a:p>
+        </p:txBody>
+      </p:sp>
+      <p:sp>
+        <p:nvSpPr>
+          <p:cNvPr id="6" name="TextBox 5"/>
+          <p:cNvSpPr txBox="1"/>
+          <p:nvPr/>
+        </p:nvSpPr>
+        <p:spPr>
+          <a:xfrm>
+            <a:off x="11521440" y="6446520"/>
+            <a:ext cx="548640" cy="320040"/>
+          </a:xfrm>
+          <a:prstGeom prst="rect">
+            <a:avLst/>
+          </a:prstGeom>
+          <a:noFill/>
+        </p:spPr>
+        <p:txBody>
+          <a:bodyPr wrap="square">
+            <a:spAutoFit/>
+          </a:bodyPr>
+          <a:lstStyle/>
+          <a:p>
+            <a:pPr algn="r">
+              <a:lnSpc>
+                <a:spcPct val="115000"/>
+              </a:lnSpc>
+            </a:pPr>
+            <a:r>
+              <a:rPr sz="1100" b="0">
+                <a:solidFill>
+                  <a:srgbClr val="CBD5E1"/>
+                </a:solidFill>
+                <a:latin typeface="Calibri"/>
+              </a:rPr>
+              <a:t>4</a:t>
             </a:r>
           </a:p>
         </p:txBody>
@@ -3869,20 +6334,126 @@
       <p:grpSpPr/>
       <p:sp>
         <p:nvSpPr>
-          <p:cNvPr id="2" name="Title 1"/>
-          <p:cNvSpPr>
-            <a:spLocks noGrp="1"/>
-          </p:cNvSpPr>
-          <p:nvPr>
-            <p:ph type="title"/>
-          </p:nvPr>
-        </p:nvSpPr>
-        <p:spPr/>
-        <p:txBody>
-          <a:bodyPr/>
-          <a:lstStyle/>
-          <a:p>
-            <a:r>
+          <p:cNvPr id="2" name="Rectangle 1"/>
+          <p:cNvSpPr/>
+          <p:nvPr/>
+        </p:nvSpPr>
+        <p:spPr>
+          <a:xfrm>
+            <a:off x="0" y="0"/>
+            <a:ext cx="12191695" cy="6858000"/>
+          </a:xfrm>
+          <a:prstGeom prst="rect">
+            <a:avLst/>
+          </a:prstGeom>
+          <a:solidFill>
+            <a:srgbClr val="0F172A"/>
+          </a:solidFill>
+          <a:ln>
+            <a:noFill/>
+          </a:ln>
+          <a:effectLst/>
+        </p:spPr>
+        <p:style>
+          <a:lnRef idx="1">
+            <a:schemeClr val="accent1"/>
+          </a:lnRef>
+          <a:fillRef idx="3">
+            <a:schemeClr val="accent1"/>
+          </a:fillRef>
+          <a:effectRef idx="2">
+            <a:schemeClr val="accent1"/>
+          </a:effectRef>
+          <a:fontRef idx="minor">
+            <a:schemeClr val="lt1"/>
+          </a:fontRef>
+        </p:style>
+        <p:txBody>
+          <a:bodyPr rtlCol="0" anchor="ctr"/>
+          <a:lstStyle/>
+          <a:p>
+            <a:pPr algn="ctr"/>
+          </a:p>
+        </p:txBody>
+      </p:sp>
+      <p:sp>
+        <p:nvSpPr>
+          <p:cNvPr id="3" name="Rectangle 2"/>
+          <p:cNvSpPr/>
+          <p:nvPr/>
+        </p:nvSpPr>
+        <p:spPr>
+          <a:xfrm>
+            <a:off x="0" y="0"/>
+            <a:ext cx="137160" cy="6858000"/>
+          </a:xfrm>
+          <a:prstGeom prst="rect">
+            <a:avLst/>
+          </a:prstGeom>
+          <a:solidFill>
+            <a:srgbClr val="F97316"/>
+          </a:solidFill>
+          <a:ln>
+            <a:noFill/>
+          </a:ln>
+          <a:effectLst/>
+        </p:spPr>
+        <p:style>
+          <a:lnRef idx="1">
+            <a:schemeClr val="accent1"/>
+          </a:lnRef>
+          <a:fillRef idx="3">
+            <a:schemeClr val="accent1"/>
+          </a:fillRef>
+          <a:effectRef idx="2">
+            <a:schemeClr val="accent1"/>
+          </a:effectRef>
+          <a:fontRef idx="minor">
+            <a:schemeClr val="lt1"/>
+          </a:fontRef>
+        </p:style>
+        <p:txBody>
+          <a:bodyPr rtlCol="0" anchor="ctr"/>
+          <a:lstStyle/>
+          <a:p>
+            <a:pPr algn="ctr"/>
+          </a:p>
+        </p:txBody>
+      </p:sp>
+      <p:sp>
+        <p:nvSpPr>
+          <p:cNvPr id="4" name="TextBox 3"/>
+          <p:cNvSpPr txBox="1"/>
+          <p:nvPr/>
+        </p:nvSpPr>
+        <p:spPr>
+          <a:xfrm>
+            <a:off x="548640" y="320040"/>
+            <a:ext cx="10972800" cy="731520"/>
+          </a:xfrm>
+          <a:prstGeom prst="rect">
+            <a:avLst/>
+          </a:prstGeom>
+          <a:noFill/>
+        </p:spPr>
+        <p:txBody>
+          <a:bodyPr wrap="square">
+            <a:spAutoFit/>
+          </a:bodyPr>
+          <a:lstStyle/>
+          <a:p>
+            <a:pPr algn="l">
+              <a:lnSpc>
+                <a:spcPct val="115000"/>
+              </a:lnSpc>
+            </a:pPr>
+            <a:r>
+              <a:rPr sz="3000" b="1">
+                <a:solidFill>
+                  <a:srgbClr val="FFFFFF"/>
+                </a:solidFill>
+                <a:latin typeface="Calibri"/>
+              </a:rPr>
               <a:t>High-Level Architecture</a:t>
             </a:r>
           </a:p>
@@ -3890,40 +6461,472 @@
       </p:sp>
       <p:sp>
         <p:nvSpPr>
-          <p:cNvPr id="3" name="Content Placeholder 2"/>
-          <p:cNvSpPr>
-            <a:spLocks noGrp="1"/>
-          </p:cNvSpPr>
-          <p:nvPr>
-            <p:ph idx="1"/>
-          </p:nvPr>
-        </p:nvSpPr>
-        <p:spPr/>
-        <p:txBody>
-          <a:bodyPr/>
-          <a:lstStyle/>
-          <a:p>
-            <a:pPr/>
-            <a:r>
-              <a:t>Crew 1 — Data Analyst Crew (4 agents)</a:t>
-            </a:r>
-          </a:p>
-          <a:p>
-            <a:pPr/>
-            <a:r>
-              <a:t>CrewAI Flow — automated handoff + validation gate</a:t>
-            </a:r>
-          </a:p>
-          <a:p>
-            <a:pPr/>
-            <a:r>
-              <a:t>Crew 2 — Data Scientist Crew (3 agents)</a:t>
-            </a:r>
-          </a:p>
-          <a:p>
-            <a:pPr/>
-            <a:r>
-              <a:t>Streamlit UI — visualizes everything end to end</a:t>
+          <p:cNvPr id="5" name="Rounded Rectangle 4"/>
+          <p:cNvSpPr/>
+          <p:nvPr/>
+        </p:nvSpPr>
+        <p:spPr>
+          <a:xfrm>
+            <a:off x="548640" y="1554480"/>
+            <a:ext cx="3383280" cy="3291840"/>
+          </a:xfrm>
+          <a:prstGeom prst="roundRect">
+            <a:avLst/>
+          </a:prstGeom>
+          <a:solidFill>
+            <a:srgbClr val="1E293B"/>
+          </a:solidFill>
+          <a:ln w="25400">
+            <a:solidFill>
+              <a:srgbClr val="2563EB"/>
+            </a:solidFill>
+          </a:ln>
+          <a:effectLst/>
+        </p:spPr>
+        <p:style>
+          <a:lnRef idx="1">
+            <a:schemeClr val="accent1"/>
+          </a:lnRef>
+          <a:fillRef idx="3">
+            <a:schemeClr val="accent1"/>
+          </a:fillRef>
+          <a:effectRef idx="2">
+            <a:schemeClr val="accent1"/>
+          </a:effectRef>
+          <a:fontRef idx="minor">
+            <a:schemeClr val="lt1"/>
+          </a:fontRef>
+        </p:style>
+        <p:txBody>
+          <a:bodyPr rtlCol="0" anchor="ctr" wrap="square" lIns="137160" tIns="109728"/>
+          <a:lstStyle/>
+          <a:p>
+            <a:pPr algn="ctr"/>
+            <a:r>
+              <a:rPr sz="1600" b="1">
+                <a:solidFill>
+                  <a:srgbClr val="2563EB"/>
+                </a:solidFill>
+              </a:rPr>
+              <a:t>Crew 1</a:t>
+            </a:r>
+            <a:br/>
+            <a:r>
+              <a:t>Data Analyst</a:t>
+            </a:r>
+          </a:p>
+          <a:p>
+            <a:pPr>
+              <a:spcBef>
+                <a:spcPts val="400"/>
+              </a:spcBef>
+            </a:pPr>
+            <a:r>
+              <a:rPr sz="1200">
+                <a:solidFill>
+                  <a:srgbClr val="CBD5E1"/>
+                </a:solidFill>
+              </a:rPr>
+              <a:t>• Ingestion</a:t>
+            </a:r>
+          </a:p>
+          <a:p>
+            <a:pPr>
+              <a:spcBef>
+                <a:spcPts val="400"/>
+              </a:spcBef>
+            </a:pPr>
+            <a:r>
+              <a:rPr sz="1200">
+                <a:solidFill>
+                  <a:srgbClr val="CBD5E1"/>
+                </a:solidFill>
+              </a:rPr>
+              <a:t>• Cleaning</a:t>
+            </a:r>
+          </a:p>
+          <a:p>
+            <a:pPr>
+              <a:spcBef>
+                <a:spcPts val="400"/>
+              </a:spcBef>
+            </a:pPr>
+            <a:r>
+              <a:rPr sz="1200">
+                <a:solidFill>
+                  <a:srgbClr val="CBD5E1"/>
+                </a:solidFill>
+              </a:rPr>
+              <a:t>• EDA</a:t>
+            </a:r>
+          </a:p>
+          <a:p>
+            <a:pPr>
+              <a:spcBef>
+                <a:spcPts val="400"/>
+              </a:spcBef>
+            </a:pPr>
+            <a:r>
+              <a:rPr sz="1200">
+                <a:solidFill>
+                  <a:srgbClr val="CBD5E1"/>
+                </a:solidFill>
+              </a:rPr>
+              <a:t>• Insights + Contract</a:t>
+            </a:r>
+          </a:p>
+        </p:txBody>
+      </p:sp>
+      <p:sp>
+        <p:nvSpPr>
+          <p:cNvPr id="6" name="Rounded Rectangle 5"/>
+          <p:cNvSpPr/>
+          <p:nvPr/>
+        </p:nvSpPr>
+        <p:spPr>
+          <a:xfrm>
+            <a:off x="4434840" y="2194560"/>
+            <a:ext cx="3291840" cy="2011680"/>
+          </a:xfrm>
+          <a:prstGeom prst="roundRect">
+            <a:avLst/>
+          </a:prstGeom>
+          <a:solidFill>
+            <a:srgbClr val="1E293B"/>
+          </a:solidFill>
+          <a:ln w="25400">
+            <a:solidFill>
+              <a:srgbClr val="F97316"/>
+            </a:solidFill>
+          </a:ln>
+          <a:effectLst/>
+        </p:spPr>
+        <p:style>
+          <a:lnRef idx="1">
+            <a:schemeClr val="accent1"/>
+          </a:lnRef>
+          <a:fillRef idx="3">
+            <a:schemeClr val="accent1"/>
+          </a:fillRef>
+          <a:effectRef idx="2">
+            <a:schemeClr val="accent1"/>
+          </a:effectRef>
+          <a:fontRef idx="minor">
+            <a:schemeClr val="lt1"/>
+          </a:fontRef>
+        </p:style>
+        <p:txBody>
+          <a:bodyPr rtlCol="0" anchor="ctr" wrap="square" lIns="137160" tIns="109728"/>
+          <a:lstStyle/>
+          <a:p>
+            <a:pPr algn="ctr"/>
+            <a:r>
+              <a:rPr sz="1600" b="1">
+                <a:solidFill>
+                  <a:srgbClr val="F97316"/>
+                </a:solidFill>
+              </a:rPr>
+              <a:t>CrewAI Flow</a:t>
+            </a:r>
+          </a:p>
+          <a:p>
+            <a:pPr>
+              <a:spcBef>
+                <a:spcPts val="400"/>
+              </a:spcBef>
+            </a:pPr>
+            <a:r>
+              <a:rPr sz="1200">
+                <a:solidFill>
+                  <a:srgbClr val="CBD5E1"/>
+                </a:solidFill>
+              </a:rPr>
+              <a:t>• Validation gate</a:t>
+            </a:r>
+          </a:p>
+          <a:p>
+            <a:pPr>
+              <a:spcBef>
+                <a:spcPts val="400"/>
+              </a:spcBef>
+            </a:pPr>
+            <a:r>
+              <a:rPr sz="1200">
+                <a:solidFill>
+                  <a:srgbClr val="CBD5E1"/>
+                </a:solidFill>
+              </a:rPr>
+              <a:t>• Fails gracefully on</a:t>
+            </a:r>
+            <a:br/>
+            <a:r>
+              <a:t>leakage / mismatch</a:t>
+            </a:r>
+          </a:p>
+          <a:p>
+            <a:pPr>
+              <a:spcBef>
+                <a:spcPts val="400"/>
+              </a:spcBef>
+            </a:pPr>
+            <a:r>
+              <a:rPr sz="1200">
+                <a:solidFill>
+                  <a:srgbClr val="CBD5E1"/>
+                </a:solidFill>
+              </a:rPr>
+              <a:t>• Auto-handoff</a:t>
+            </a:r>
+          </a:p>
+        </p:txBody>
+      </p:sp>
+      <p:sp>
+        <p:nvSpPr>
+          <p:cNvPr id="7" name="Rounded Rectangle 6"/>
+          <p:cNvSpPr/>
+          <p:nvPr/>
+        </p:nvSpPr>
+        <p:spPr>
+          <a:xfrm>
+            <a:off x="8275320" y="1554480"/>
+            <a:ext cx="3383280" cy="3291840"/>
+          </a:xfrm>
+          <a:prstGeom prst="roundRect">
+            <a:avLst/>
+          </a:prstGeom>
+          <a:solidFill>
+            <a:srgbClr val="1E293B"/>
+          </a:solidFill>
+          <a:ln w="25400">
+            <a:solidFill>
+              <a:srgbClr val="10B981"/>
+            </a:solidFill>
+          </a:ln>
+          <a:effectLst/>
+        </p:spPr>
+        <p:style>
+          <a:lnRef idx="1">
+            <a:schemeClr val="accent1"/>
+          </a:lnRef>
+          <a:fillRef idx="3">
+            <a:schemeClr val="accent1"/>
+          </a:fillRef>
+          <a:effectRef idx="2">
+            <a:schemeClr val="accent1"/>
+          </a:effectRef>
+          <a:fontRef idx="minor">
+            <a:schemeClr val="lt1"/>
+          </a:fontRef>
+        </p:style>
+        <p:txBody>
+          <a:bodyPr rtlCol="0" anchor="ctr" wrap="square" lIns="137160" tIns="109728"/>
+          <a:lstStyle/>
+          <a:p>
+            <a:pPr algn="ctr"/>
+            <a:r>
+              <a:rPr sz="1600" b="1">
+                <a:solidFill>
+                  <a:srgbClr val="10B981"/>
+                </a:solidFill>
+              </a:rPr>
+              <a:t>Crew 2</a:t>
+            </a:r>
+            <a:br/>
+            <a:r>
+              <a:t>Data Scientist</a:t>
+            </a:r>
+          </a:p>
+          <a:p>
+            <a:pPr>
+              <a:spcBef>
+                <a:spcPts val="400"/>
+              </a:spcBef>
+            </a:pPr>
+            <a:r>
+              <a:rPr sz="1200">
+                <a:solidFill>
+                  <a:srgbClr val="CBD5E1"/>
+                </a:solidFill>
+              </a:rPr>
+              <a:t>• Contract Validator</a:t>
+            </a:r>
+          </a:p>
+          <a:p>
+            <a:pPr>
+              <a:spcBef>
+                <a:spcPts val="400"/>
+              </a:spcBef>
+            </a:pPr>
+            <a:r>
+              <a:rPr sz="1200">
+                <a:solidFill>
+                  <a:srgbClr val="CBD5E1"/>
+                </a:solidFill>
+              </a:rPr>
+              <a:t>• Feature Engineer</a:t>
+            </a:r>
+          </a:p>
+          <a:p>
+            <a:pPr>
+              <a:spcBef>
+                <a:spcPts val="400"/>
+              </a:spcBef>
+            </a:pPr>
+            <a:r>
+              <a:rPr sz="1200">
+                <a:solidFill>
+                  <a:srgbClr val="CBD5E1"/>
+                </a:solidFill>
+              </a:rPr>
+              <a:t>• ML Engineer (train + eval)</a:t>
+            </a:r>
+          </a:p>
+        </p:txBody>
+      </p:sp>
+      <p:cxnSp>
+        <p:nvCxnSpPr>
+          <p:cNvPr id="8" name="Connector 7"/>
+          <p:cNvCxnSpPr/>
+          <p:nvPr/>
+        </p:nvCxnSpPr>
+        <p:spPr>
+          <a:xfrm>
+            <a:off x="3931920" y="3200400"/>
+            <a:ext cx="502920" cy="0"/>
+          </a:xfrm>
+          <a:prstGeom prst="bentConnector3">
+            <a:avLst/>
+          </a:prstGeom>
+          <a:ln w="31750">
+            <a:solidFill>
+              <a:srgbClr val="FFFFFF"/>
+            </a:solidFill>
+          </a:ln>
+        </p:spPr>
+        <p:style>
+          <a:lnRef idx="2">
+            <a:schemeClr val="accent1"/>
+          </a:lnRef>
+          <a:fillRef idx="0">
+            <a:schemeClr val="accent1"/>
+          </a:fillRef>
+          <a:effectRef idx="1">
+            <a:schemeClr val="accent1"/>
+          </a:effectRef>
+          <a:fontRef idx="minor">
+            <a:schemeClr val="tx1"/>
+          </a:fontRef>
+        </p:style>
+      </p:cxnSp>
+      <p:cxnSp>
+        <p:nvCxnSpPr>
+          <p:cNvPr id="9" name="Connector 8"/>
+          <p:cNvCxnSpPr/>
+          <p:nvPr/>
+        </p:nvCxnSpPr>
+        <p:spPr>
+          <a:xfrm>
+            <a:off x="7726679" y="3200400"/>
+            <a:ext cx="548641" cy="0"/>
+          </a:xfrm>
+          <a:prstGeom prst="bentConnector3">
+            <a:avLst/>
+          </a:prstGeom>
+          <a:ln w="31750">
+            <a:solidFill>
+              <a:srgbClr val="FFFFFF"/>
+            </a:solidFill>
+          </a:ln>
+        </p:spPr>
+        <p:style>
+          <a:lnRef idx="2">
+            <a:schemeClr val="accent1"/>
+          </a:lnRef>
+          <a:fillRef idx="0">
+            <a:schemeClr val="accent1"/>
+          </a:fillRef>
+          <a:effectRef idx="1">
+            <a:schemeClr val="accent1"/>
+          </a:effectRef>
+          <a:fontRef idx="minor">
+            <a:schemeClr val="tx1"/>
+          </a:fontRef>
+        </p:style>
+      </p:cxnSp>
+      <p:sp>
+        <p:nvSpPr>
+          <p:cNvPr id="10" name="TextBox 9"/>
+          <p:cNvSpPr txBox="1"/>
+          <p:nvPr/>
+        </p:nvSpPr>
+        <p:spPr>
+          <a:xfrm>
+            <a:off x="548640" y="5120640"/>
+            <a:ext cx="11064240" cy="1097280"/>
+          </a:xfrm>
+          <a:prstGeom prst="rect">
+            <a:avLst/>
+          </a:prstGeom>
+          <a:noFill/>
+        </p:spPr>
+        <p:txBody>
+          <a:bodyPr wrap="square">
+            <a:spAutoFit/>
+          </a:bodyPr>
+          <a:lstStyle/>
+          <a:p>
+            <a:pPr algn="l">
+              <a:lnSpc>
+                <a:spcPct val="115000"/>
+              </a:lnSpc>
+            </a:pPr>
+            <a:r>
+              <a:rPr sz="1300" b="0">
+                <a:solidFill>
+                  <a:srgbClr val="CBD5E1"/>
+                </a:solidFill>
+                <a:latin typeface="Calibri"/>
+              </a:rPr>
+              <a:t>Output: clean_data.csv → eda_report.html → insights.md → dataset_contract.json → features.csv → model.pkl → evaluation_report.md → model_card.md</a:t>
+            </a:r>
+          </a:p>
+        </p:txBody>
+      </p:sp>
+      <p:sp>
+        <p:nvSpPr>
+          <p:cNvPr id="11" name="TextBox 10"/>
+          <p:cNvSpPr txBox="1"/>
+          <p:nvPr/>
+        </p:nvSpPr>
+        <p:spPr>
+          <a:xfrm>
+            <a:off x="11521440" y="6446520"/>
+            <a:ext cx="548640" cy="320040"/>
+          </a:xfrm>
+          <a:prstGeom prst="rect">
+            <a:avLst/>
+          </a:prstGeom>
+          <a:noFill/>
+        </p:spPr>
+        <p:txBody>
+          <a:bodyPr wrap="square">
+            <a:spAutoFit/>
+          </a:bodyPr>
+          <a:lstStyle/>
+          <a:p>
+            <a:pPr algn="r">
+              <a:lnSpc>
+                <a:spcPct val="115000"/>
+              </a:lnSpc>
+            </a:pPr>
+            <a:r>
+              <a:rPr sz="1100" b="0">
+                <a:solidFill>
+                  <a:srgbClr val="CBD5E1"/>
+                </a:solidFill>
+                <a:latin typeface="Calibri"/>
+              </a:rPr>
+              <a:t>5</a:t>
             </a:r>
           </a:p>
         </p:txBody>
@@ -3948,61 +6951,393 @@
       <p:grpSpPr/>
       <p:sp>
         <p:nvSpPr>
-          <p:cNvPr id="2" name="Title 1"/>
-          <p:cNvSpPr>
-            <a:spLocks noGrp="1"/>
-          </p:cNvSpPr>
-          <p:nvPr>
-            <p:ph type="title"/>
-          </p:nvPr>
-        </p:nvSpPr>
-        <p:spPr/>
-        <p:txBody>
-          <a:bodyPr/>
-          <a:lstStyle/>
-          <a:p>
-            <a:r>
-              <a:t>Crew 1 — Data Analyst</a:t>
-            </a:r>
-          </a:p>
-        </p:txBody>
-      </p:sp>
-      <p:sp>
-        <p:nvSpPr>
-          <p:cNvPr id="3" name="Content Placeholder 2"/>
-          <p:cNvSpPr>
-            <a:spLocks noGrp="1"/>
-          </p:cNvSpPr>
-          <p:nvPr>
-            <p:ph idx="1"/>
-          </p:nvPr>
-        </p:nvSpPr>
-        <p:spPr/>
-        <p:txBody>
-          <a:bodyPr/>
-          <a:lstStyle/>
-          <a:p>
-            <a:pPr/>
-            <a:r>
-              <a:t>Data Ingestion Specialist — profiles the raw dataset</a:t>
-            </a:r>
-          </a:p>
-          <a:p>
-            <a:pPr/>
-            <a:r>
-              <a:t>Data Cleaning Engineer — produces clean_data.csv</a:t>
-            </a:r>
-          </a:p>
-          <a:p>
-            <a:pPr/>
-            <a:r>
-              <a:t>EDA Analyst — produces eda_report.html</a:t>
-            </a:r>
-          </a:p>
-          <a:p>
-            <a:pPr/>
-            <a:r>
-              <a:t>Insights &amp; Contract Writer — produces insights.md + dataset_contract.json</a:t>
+          <p:cNvPr id="2" name="Rectangle 1"/>
+          <p:cNvSpPr/>
+          <p:nvPr/>
+        </p:nvSpPr>
+        <p:spPr>
+          <a:xfrm>
+            <a:off x="0" y="0"/>
+            <a:ext cx="12191695" cy="6858000"/>
+          </a:xfrm>
+          <a:prstGeom prst="rect">
+            <a:avLst/>
+          </a:prstGeom>
+          <a:solidFill>
+            <a:srgbClr val="0F172A"/>
+          </a:solidFill>
+          <a:ln>
+            <a:noFill/>
+          </a:ln>
+          <a:effectLst/>
+        </p:spPr>
+        <p:style>
+          <a:lnRef idx="1">
+            <a:schemeClr val="accent1"/>
+          </a:lnRef>
+          <a:fillRef idx="3">
+            <a:schemeClr val="accent1"/>
+          </a:fillRef>
+          <a:effectRef idx="2">
+            <a:schemeClr val="accent1"/>
+          </a:effectRef>
+          <a:fontRef idx="minor">
+            <a:schemeClr val="lt1"/>
+          </a:fontRef>
+        </p:style>
+        <p:txBody>
+          <a:bodyPr rtlCol="0" anchor="ctr"/>
+          <a:lstStyle/>
+          <a:p>
+            <a:pPr algn="ctr"/>
+          </a:p>
+        </p:txBody>
+      </p:sp>
+      <p:sp>
+        <p:nvSpPr>
+          <p:cNvPr id="3" name="Rectangle 2"/>
+          <p:cNvSpPr/>
+          <p:nvPr/>
+        </p:nvSpPr>
+        <p:spPr>
+          <a:xfrm>
+            <a:off x="0" y="0"/>
+            <a:ext cx="137160" cy="6858000"/>
+          </a:xfrm>
+          <a:prstGeom prst="rect">
+            <a:avLst/>
+          </a:prstGeom>
+          <a:solidFill>
+            <a:srgbClr val="F97316"/>
+          </a:solidFill>
+          <a:ln>
+            <a:noFill/>
+          </a:ln>
+          <a:effectLst/>
+        </p:spPr>
+        <p:style>
+          <a:lnRef idx="1">
+            <a:schemeClr val="accent1"/>
+          </a:lnRef>
+          <a:fillRef idx="3">
+            <a:schemeClr val="accent1"/>
+          </a:fillRef>
+          <a:effectRef idx="2">
+            <a:schemeClr val="accent1"/>
+          </a:effectRef>
+          <a:fontRef idx="minor">
+            <a:schemeClr val="lt1"/>
+          </a:fontRef>
+        </p:style>
+        <p:txBody>
+          <a:bodyPr rtlCol="0" anchor="ctr"/>
+          <a:lstStyle/>
+          <a:p>
+            <a:pPr algn="ctr"/>
+          </a:p>
+        </p:txBody>
+      </p:sp>
+      <p:sp>
+        <p:nvSpPr>
+          <p:cNvPr id="4" name="TextBox 3"/>
+          <p:cNvSpPr txBox="1"/>
+          <p:nvPr/>
+        </p:nvSpPr>
+        <p:spPr>
+          <a:xfrm>
+            <a:off x="548640" y="320040"/>
+            <a:ext cx="10972800" cy="731520"/>
+          </a:xfrm>
+          <a:prstGeom prst="rect">
+            <a:avLst/>
+          </a:prstGeom>
+          <a:noFill/>
+        </p:spPr>
+        <p:txBody>
+          <a:bodyPr wrap="square">
+            <a:spAutoFit/>
+          </a:bodyPr>
+          <a:lstStyle/>
+          <a:p>
+            <a:pPr algn="l">
+              <a:lnSpc>
+                <a:spcPct val="115000"/>
+              </a:lnSpc>
+            </a:pPr>
+            <a:r>
+              <a:rPr sz="3000" b="1">
+                <a:solidFill>
+                  <a:srgbClr val="FFFFFF"/>
+                </a:solidFill>
+                <a:latin typeface="Calibri"/>
+              </a:rPr>
+              <a:t>Dataset</a:t>
+            </a:r>
+          </a:p>
+        </p:txBody>
+      </p:sp>
+      <p:sp>
+        <p:nvSpPr>
+          <p:cNvPr id="5" name="TextBox 4"/>
+          <p:cNvSpPr txBox="1"/>
+          <p:nvPr/>
+        </p:nvSpPr>
+        <p:spPr>
+          <a:xfrm>
+            <a:off x="640080" y="1463040"/>
+            <a:ext cx="5303520" cy="4572000"/>
+          </a:xfrm>
+          <a:prstGeom prst="rect">
+            <a:avLst/>
+          </a:prstGeom>
+          <a:noFill/>
+        </p:spPr>
+        <p:txBody>
+          <a:bodyPr wrap="square">
+            <a:spAutoFit/>
+          </a:bodyPr>
+          <a:lstStyle/>
+          <a:p>
+            <a:pPr>
+              <a:lnSpc>
+                <a:spcPct val="130000"/>
+              </a:lnSpc>
+              <a:spcAft>
+                <a:spcPts val="1000"/>
+              </a:spcAft>
+            </a:pPr>
+            <a:r>
+              <a:rPr sz="1600">
+                <a:solidFill>
+                  <a:srgbClr val="CBD5E1"/>
+                </a:solidFill>
+                <a:latin typeface="Calibri"/>
+              </a:rPr>
+              <a:t>●  Hotel Booking Demand — 119,390 real hotel reservations.</a:t>
+            </a:r>
+          </a:p>
+          <a:p>
+            <a:pPr>
+              <a:lnSpc>
+                <a:spcPct val="130000"/>
+              </a:lnSpc>
+              <a:spcAft>
+                <a:spcPts val="1000"/>
+              </a:spcAft>
+            </a:pPr>
+            <a:r>
+              <a:rPr sz="1600">
+                <a:solidFill>
+                  <a:srgbClr val="CBD5E1"/>
+                </a:solidFill>
+                <a:latin typeface="Calibri"/>
+              </a:rPr>
+              <a:t>●  Resort Hotel + City Hotel, Portugal, 2015–2017.</a:t>
+            </a:r>
+          </a:p>
+          <a:p>
+            <a:pPr>
+              <a:lnSpc>
+                <a:spcPct val="130000"/>
+              </a:lnSpc>
+              <a:spcAft>
+                <a:spcPts val="1000"/>
+              </a:spcAft>
+            </a:pPr>
+            <a:r>
+              <a:rPr sz="1600">
+                <a:solidFill>
+                  <a:srgbClr val="CBD5E1"/>
+                </a:solidFill>
+                <a:latin typeface="Calibri"/>
+              </a:rPr>
+              <a:t>●  Temporal split: train on 2015–2016 (77,438 rows), test on 2017 (40,129 rows) — simulates real forecasting.</a:t>
+            </a:r>
+          </a:p>
+          <a:p>
+            <a:pPr>
+              <a:lnSpc>
+                <a:spcPct val="130000"/>
+              </a:lnSpc>
+              <a:spcAft>
+                <a:spcPts val="1000"/>
+              </a:spcAft>
+            </a:pPr>
+            <a:r>
+              <a:rPr sz="1600">
+                <a:solidFill>
+                  <a:srgbClr val="CBD5E1"/>
+                </a:solidFill>
+                <a:latin typeface="Calibri"/>
+              </a:rPr>
+              <a:t>●  Leakage columns explicitly excluded: reservation_status, reservation_status_date.</a:t>
+            </a:r>
+          </a:p>
+          <a:p>
+            <a:pPr>
+              <a:lnSpc>
+                <a:spcPct val="130000"/>
+              </a:lnSpc>
+              <a:spcAft>
+                <a:spcPts val="1000"/>
+              </a:spcAft>
+            </a:pPr>
+            <a:r>
+              <a:rPr sz="1600">
+                <a:solidFill>
+                  <a:srgbClr val="CBD5E1"/>
+                </a:solidFill>
+                <a:latin typeface="Calibri"/>
+              </a:rPr>
+              <a:t>●  33 columns in the clean data; 25 contract-approved modeling features.</a:t>
+            </a:r>
+          </a:p>
+        </p:txBody>
+      </p:sp>
+      <p:sp>
+        <p:nvSpPr>
+          <p:cNvPr id="6" name="Rounded Rectangle 5"/>
+          <p:cNvSpPr/>
+          <p:nvPr/>
+        </p:nvSpPr>
+        <p:spPr>
+          <a:xfrm>
+            <a:off x="6126480" y="1463040"/>
+            <a:ext cx="5394960" cy="4983480"/>
+          </a:xfrm>
+          <a:prstGeom prst="roundRect">
+            <a:avLst/>
+          </a:prstGeom>
+          <a:solidFill>
+            <a:srgbClr val="1E293B"/>
+          </a:solidFill>
+          <a:ln w="12700">
+            <a:solidFill>
+              <a:srgbClr val="334155"/>
+            </a:solidFill>
+          </a:ln>
+          <a:effectLst/>
+        </p:spPr>
+        <p:style>
+          <a:lnRef idx="1">
+            <a:schemeClr val="accent1"/>
+          </a:lnRef>
+          <a:fillRef idx="3">
+            <a:schemeClr val="accent1"/>
+          </a:fillRef>
+          <a:effectRef idx="2">
+            <a:schemeClr val="accent1"/>
+          </a:effectRef>
+          <a:fontRef idx="minor">
+            <a:schemeClr val="lt1"/>
+          </a:fontRef>
+        </p:style>
+        <p:txBody>
+          <a:bodyPr rtlCol="0" anchor="ctr"/>
+          <a:lstStyle/>
+          <a:p>
+            <a:pPr algn="ctr"/>
+          </a:p>
+        </p:txBody>
+      </p:sp>
+      <p:pic>
+        <p:nvPicPr>
+          <p:cNvPr id="7" name="Picture 6" descr="bookings_by_month.png"/>
+          <p:cNvPicPr>
+            <a:picLocks noChangeAspect="1"/>
+          </p:cNvPicPr>
+          <p:nvPr/>
+        </p:nvPicPr>
+        <p:blipFill>
+          <a:blip r:embed="rId2"/>
+          <a:stretch>
+            <a:fillRect/>
+          </a:stretch>
+        </p:blipFill>
+        <p:spPr>
+          <a:xfrm>
+            <a:off x="6217920" y="1554480"/>
+            <a:ext cx="8065008" cy="4480560"/>
+          </a:xfrm>
+          <a:prstGeom prst="rect">
+            <a:avLst/>
+          </a:prstGeom>
+        </p:spPr>
+      </p:pic>
+      <p:sp>
+        <p:nvSpPr>
+          <p:cNvPr id="8" name="TextBox 7"/>
+          <p:cNvSpPr txBox="1"/>
+          <p:nvPr/>
+        </p:nvSpPr>
+        <p:spPr>
+          <a:xfrm>
+            <a:off x="6126480" y="6080760"/>
+            <a:ext cx="5394960" cy="365760"/>
+          </a:xfrm>
+          <a:prstGeom prst="rect">
+            <a:avLst/>
+          </a:prstGeom>
+          <a:noFill/>
+        </p:spPr>
+        <p:txBody>
+          <a:bodyPr wrap="square">
+            <a:spAutoFit/>
+          </a:bodyPr>
+          <a:lstStyle/>
+          <a:p>
+            <a:pPr algn="ctr">
+              <a:lnSpc>
+                <a:spcPct val="115000"/>
+              </a:lnSpc>
+            </a:pPr>
+            <a:r>
+              <a:rPr sz="1100" b="0">
+                <a:solidFill>
+                  <a:srgbClr val="CBD5E1"/>
+                </a:solidFill>
+                <a:latin typeface="Calibri"/>
+              </a:rPr>
+              <a:t>Seasonal booking volume — summer peak clearly visible</a:t>
+            </a:r>
+          </a:p>
+        </p:txBody>
+      </p:sp>
+      <p:sp>
+        <p:nvSpPr>
+          <p:cNvPr id="9" name="TextBox 8"/>
+          <p:cNvSpPr txBox="1"/>
+          <p:nvPr/>
+        </p:nvSpPr>
+        <p:spPr>
+          <a:xfrm>
+            <a:off x="11521440" y="6446520"/>
+            <a:ext cx="548640" cy="320040"/>
+          </a:xfrm>
+          <a:prstGeom prst="rect">
+            <a:avLst/>
+          </a:prstGeom>
+          <a:noFill/>
+        </p:spPr>
+        <p:txBody>
+          <a:bodyPr wrap="square">
+            <a:spAutoFit/>
+          </a:bodyPr>
+          <a:lstStyle/>
+          <a:p>
+            <a:pPr algn="r">
+              <a:lnSpc>
+                <a:spcPct val="115000"/>
+              </a:lnSpc>
+            </a:pPr>
+            <a:r>
+              <a:rPr sz="1100" b="0">
+                <a:solidFill>
+                  <a:srgbClr val="CBD5E1"/>
+                </a:solidFill>
+                <a:latin typeface="Calibri"/>
+              </a:rPr>
+              <a:t>6</a:t>
             </a:r>
           </a:p>
         </p:txBody>
@@ -4027,61 +7362,374 @@
       <p:grpSpPr/>
       <p:sp>
         <p:nvSpPr>
-          <p:cNvPr id="2" name="Title 1"/>
-          <p:cNvSpPr>
-            <a:spLocks noGrp="1"/>
-          </p:cNvSpPr>
-          <p:nvPr>
-            <p:ph type="title"/>
-          </p:nvPr>
-        </p:nvSpPr>
-        <p:spPr/>
-        <p:txBody>
-          <a:bodyPr/>
-          <a:lstStyle/>
-          <a:p>
-            <a:r>
-              <a:t>Dataset</a:t>
-            </a:r>
-          </a:p>
-        </p:txBody>
-      </p:sp>
-      <p:sp>
-        <p:nvSpPr>
-          <p:cNvPr id="3" name="Content Placeholder 2"/>
-          <p:cNvSpPr>
-            <a:spLocks noGrp="1"/>
-          </p:cNvSpPr>
-          <p:nvPr>
-            <p:ph idx="1"/>
-          </p:nvPr>
-        </p:nvSpPr>
-        <p:spPr/>
-        <p:txBody>
-          <a:bodyPr/>
-          <a:lstStyle/>
-          <a:p>
-            <a:pPr/>
-            <a:r>
-              <a:t>Hotel Booking Demand — 119,390 real hotel reservations</a:t>
-            </a:r>
-          </a:p>
-          <a:p>
-            <a:pPr/>
-            <a:r>
-              <a:t>Resort Hotel + City Hotel, Portugal, 2015-2017</a:t>
-            </a:r>
-          </a:p>
-          <a:p>
-            <a:pPr/>
-            <a:r>
-              <a:t>Target: is_canceled (37.3% cancellation rate)</a:t>
-            </a:r>
-          </a:p>
-          <a:p>
-            <a:pPr/>
-            <a:r>
-              <a:t>Chosen for direct relevance to hospitality revenue management</a:t>
+          <p:cNvPr id="2" name="Rectangle 1"/>
+          <p:cNvSpPr/>
+          <p:nvPr/>
+        </p:nvSpPr>
+        <p:spPr>
+          <a:xfrm>
+            <a:off x="0" y="0"/>
+            <a:ext cx="12191695" cy="6858000"/>
+          </a:xfrm>
+          <a:prstGeom prst="rect">
+            <a:avLst/>
+          </a:prstGeom>
+          <a:solidFill>
+            <a:srgbClr val="0F172A"/>
+          </a:solidFill>
+          <a:ln>
+            <a:noFill/>
+          </a:ln>
+          <a:effectLst/>
+        </p:spPr>
+        <p:style>
+          <a:lnRef idx="1">
+            <a:schemeClr val="accent1"/>
+          </a:lnRef>
+          <a:fillRef idx="3">
+            <a:schemeClr val="accent1"/>
+          </a:fillRef>
+          <a:effectRef idx="2">
+            <a:schemeClr val="accent1"/>
+          </a:effectRef>
+          <a:fontRef idx="minor">
+            <a:schemeClr val="lt1"/>
+          </a:fontRef>
+        </p:style>
+        <p:txBody>
+          <a:bodyPr rtlCol="0" anchor="ctr"/>
+          <a:lstStyle/>
+          <a:p>
+            <a:pPr algn="ctr"/>
+          </a:p>
+        </p:txBody>
+      </p:sp>
+      <p:sp>
+        <p:nvSpPr>
+          <p:cNvPr id="3" name="Rectangle 2"/>
+          <p:cNvSpPr/>
+          <p:nvPr/>
+        </p:nvSpPr>
+        <p:spPr>
+          <a:xfrm>
+            <a:off x="0" y="0"/>
+            <a:ext cx="137160" cy="6858000"/>
+          </a:xfrm>
+          <a:prstGeom prst="rect">
+            <a:avLst/>
+          </a:prstGeom>
+          <a:solidFill>
+            <a:srgbClr val="F97316"/>
+          </a:solidFill>
+          <a:ln>
+            <a:noFill/>
+          </a:ln>
+          <a:effectLst/>
+        </p:spPr>
+        <p:style>
+          <a:lnRef idx="1">
+            <a:schemeClr val="accent1"/>
+          </a:lnRef>
+          <a:fillRef idx="3">
+            <a:schemeClr val="accent1"/>
+          </a:fillRef>
+          <a:effectRef idx="2">
+            <a:schemeClr val="accent1"/>
+          </a:effectRef>
+          <a:fontRef idx="minor">
+            <a:schemeClr val="lt1"/>
+          </a:fontRef>
+        </p:style>
+        <p:txBody>
+          <a:bodyPr rtlCol="0" anchor="ctr"/>
+          <a:lstStyle/>
+          <a:p>
+            <a:pPr algn="ctr"/>
+          </a:p>
+        </p:txBody>
+      </p:sp>
+      <p:sp>
+        <p:nvSpPr>
+          <p:cNvPr id="4" name="TextBox 3"/>
+          <p:cNvSpPr txBox="1"/>
+          <p:nvPr/>
+        </p:nvSpPr>
+        <p:spPr>
+          <a:xfrm>
+            <a:off x="548640" y="320040"/>
+            <a:ext cx="10972800" cy="731520"/>
+          </a:xfrm>
+          <a:prstGeom prst="rect">
+            <a:avLst/>
+          </a:prstGeom>
+          <a:noFill/>
+        </p:spPr>
+        <p:txBody>
+          <a:bodyPr wrap="square">
+            <a:spAutoFit/>
+          </a:bodyPr>
+          <a:lstStyle/>
+          <a:p>
+            <a:pPr algn="l">
+              <a:lnSpc>
+                <a:spcPct val="115000"/>
+              </a:lnSpc>
+            </a:pPr>
+            <a:r>
+              <a:rPr sz="3000" b="1">
+                <a:solidFill>
+                  <a:srgbClr val="FFFFFF"/>
+                </a:solidFill>
+                <a:latin typeface="Calibri"/>
+              </a:rPr>
+              <a:t>Crew 1 — Data Analyst (4 Agents)</a:t>
+            </a:r>
+          </a:p>
+        </p:txBody>
+      </p:sp>
+      <p:sp>
+        <p:nvSpPr>
+          <p:cNvPr id="5" name="TextBox 4"/>
+          <p:cNvSpPr txBox="1"/>
+          <p:nvPr/>
+        </p:nvSpPr>
+        <p:spPr>
+          <a:xfrm>
+            <a:off x="640080" y="1463040"/>
+            <a:ext cx="5486400" cy="4572000"/>
+          </a:xfrm>
+          <a:prstGeom prst="rect">
+            <a:avLst/>
+          </a:prstGeom>
+          <a:noFill/>
+        </p:spPr>
+        <p:txBody>
+          <a:bodyPr wrap="square">
+            <a:spAutoFit/>
+          </a:bodyPr>
+          <a:lstStyle/>
+          <a:p>
+            <a:pPr>
+              <a:lnSpc>
+                <a:spcPct val="130000"/>
+              </a:lnSpc>
+              <a:spcAft>
+                <a:spcPts val="1000"/>
+              </a:spcAft>
+            </a:pPr>
+            <a:r>
+              <a:rPr sz="1600">
+                <a:solidFill>
+                  <a:srgbClr val="CBD5E1"/>
+                </a:solidFill>
+                <a:latin typeface="Calibri"/>
+              </a:rPr>
+              <a:t>●  Data Ingestion Specialist — profiles the raw dataset, flags types and ranges.</a:t>
+            </a:r>
+          </a:p>
+          <a:p>
+            <a:pPr>
+              <a:lnSpc>
+                <a:spcPct val="130000"/>
+              </a:lnSpc>
+              <a:spcAft>
+                <a:spcPts val="1000"/>
+              </a:spcAft>
+            </a:pPr>
+            <a:r>
+              <a:rPr sz="1600">
+                <a:solidFill>
+                  <a:srgbClr val="CBD5E1"/>
+                </a:solidFill>
+                <a:latin typeface="Calibri"/>
+              </a:rPr>
+              <a:t>●  Data Cleaning Specialist — handles nulls, duplicates, outliers.</a:t>
+            </a:r>
+          </a:p>
+          <a:p>
+            <a:pPr>
+              <a:lnSpc>
+                <a:spcPct val="130000"/>
+              </a:lnSpc>
+              <a:spcAft>
+                <a:spcPts val="1000"/>
+              </a:spcAft>
+            </a:pPr>
+            <a:r>
+              <a:rPr sz="1600">
+                <a:solidFill>
+                  <a:srgbClr val="CBD5E1"/>
+                </a:solidFill>
+                <a:latin typeface="Calibri"/>
+              </a:rPr>
+              <a:t>●  EDA Analyst — generates statistics and an HTML report.</a:t>
+            </a:r>
+          </a:p>
+          <a:p>
+            <a:pPr>
+              <a:lnSpc>
+                <a:spcPct val="130000"/>
+              </a:lnSpc>
+              <a:spcAft>
+                <a:spcPts val="1000"/>
+              </a:spcAft>
+            </a:pPr>
+            <a:r>
+              <a:rPr sz="1600">
+                <a:solidFill>
+                  <a:srgbClr val="CBD5E1"/>
+                </a:solidFill>
+                <a:latin typeface="Calibri"/>
+              </a:rPr>
+              <a:t>●  Insights &amp; Contract Writer — writes business insights and produces the machine-readable dataset_contract.json used to gate Crew 2.</a:t>
+            </a:r>
+          </a:p>
+        </p:txBody>
+      </p:sp>
+      <p:sp>
+        <p:nvSpPr>
+          <p:cNvPr id="6" name="Rounded Rectangle 5"/>
+          <p:cNvSpPr/>
+          <p:nvPr/>
+        </p:nvSpPr>
+        <p:spPr>
+          <a:xfrm>
+            <a:off x="6400800" y="1463040"/>
+            <a:ext cx="5120640" cy="4983480"/>
+          </a:xfrm>
+          <a:prstGeom prst="roundRect">
+            <a:avLst/>
+          </a:prstGeom>
+          <a:solidFill>
+            <a:srgbClr val="1E293B"/>
+          </a:solidFill>
+          <a:ln w="12700">
+            <a:solidFill>
+              <a:srgbClr val="334155"/>
+            </a:solidFill>
+          </a:ln>
+          <a:effectLst/>
+        </p:spPr>
+        <p:style>
+          <a:lnRef idx="1">
+            <a:schemeClr val="accent1"/>
+          </a:lnRef>
+          <a:fillRef idx="3">
+            <a:schemeClr val="accent1"/>
+          </a:fillRef>
+          <a:effectRef idx="2">
+            <a:schemeClr val="accent1"/>
+          </a:effectRef>
+          <a:fontRef idx="minor">
+            <a:schemeClr val="lt1"/>
+          </a:fontRef>
+        </p:style>
+        <p:txBody>
+          <a:bodyPr rtlCol="0" anchor="ctr"/>
+          <a:lstStyle/>
+          <a:p>
+            <a:pPr algn="ctr"/>
+          </a:p>
+        </p:txBody>
+      </p:sp>
+      <p:pic>
+        <p:nvPicPr>
+          <p:cNvPr id="7" name="Picture 6" descr="cancel_by_hotel.png"/>
+          <p:cNvPicPr>
+            <a:picLocks noChangeAspect="1"/>
+          </p:cNvPicPr>
+          <p:nvPr/>
+        </p:nvPicPr>
+        <p:blipFill>
+          <a:blip r:embed="rId2"/>
+          <a:stretch>
+            <a:fillRect/>
+          </a:stretch>
+        </p:blipFill>
+        <p:spPr>
+          <a:xfrm>
+            <a:off x="6492240" y="1554480"/>
+            <a:ext cx="6272784" cy="4480560"/>
+          </a:xfrm>
+          <a:prstGeom prst="rect">
+            <a:avLst/>
+          </a:prstGeom>
+        </p:spPr>
+      </p:pic>
+      <p:sp>
+        <p:nvSpPr>
+          <p:cNvPr id="8" name="TextBox 7"/>
+          <p:cNvSpPr txBox="1"/>
+          <p:nvPr/>
+        </p:nvSpPr>
+        <p:spPr>
+          <a:xfrm>
+            <a:off x="6400800" y="6080760"/>
+            <a:ext cx="5120640" cy="365760"/>
+          </a:xfrm>
+          <a:prstGeom prst="rect">
+            <a:avLst/>
+          </a:prstGeom>
+          <a:noFill/>
+        </p:spPr>
+        <p:txBody>
+          <a:bodyPr wrap="square">
+            <a:spAutoFit/>
+          </a:bodyPr>
+          <a:lstStyle/>
+          <a:p>
+            <a:pPr algn="ctr">
+              <a:lnSpc>
+                <a:spcPct val="115000"/>
+              </a:lnSpc>
+            </a:pPr>
+            <a:r>
+              <a:rPr sz="1100" b="0">
+                <a:solidFill>
+                  <a:srgbClr val="CBD5E1"/>
+                </a:solidFill>
+                <a:latin typeface="Calibri"/>
+              </a:rPr>
+              <a:t>City Hotel cancels far more often than Resort Hotel</a:t>
+            </a:r>
+          </a:p>
+        </p:txBody>
+      </p:sp>
+      <p:sp>
+        <p:nvSpPr>
+          <p:cNvPr id="9" name="TextBox 8"/>
+          <p:cNvSpPr txBox="1"/>
+          <p:nvPr/>
+        </p:nvSpPr>
+        <p:spPr>
+          <a:xfrm>
+            <a:off x="11521440" y="6446520"/>
+            <a:ext cx="548640" cy="320040"/>
+          </a:xfrm>
+          <a:prstGeom prst="rect">
+            <a:avLst/>
+          </a:prstGeom>
+          <a:noFill/>
+        </p:spPr>
+        <p:txBody>
+          <a:bodyPr wrap="square">
+            <a:spAutoFit/>
+          </a:bodyPr>
+          <a:lstStyle/>
+          <a:p>
+            <a:pPr algn="r">
+              <a:lnSpc>
+                <a:spcPct val="115000"/>
+              </a:lnSpc>
+            </a:pPr>
+            <a:r>
+              <a:rPr sz="1100" b="0">
+                <a:solidFill>
+                  <a:srgbClr val="CBD5E1"/>
+                </a:solidFill>
+                <a:latin typeface="Calibri"/>
+              </a:rPr>
+              <a:t>7</a:t>
             </a:r>
           </a:p>
         </p:txBody>
@@ -4106,20 +7754,126 @@
       <p:grpSpPr/>
       <p:sp>
         <p:nvSpPr>
-          <p:cNvPr id="2" name="Title 1"/>
-          <p:cNvSpPr>
-            <a:spLocks noGrp="1"/>
-          </p:cNvSpPr>
-          <p:nvPr>
-            <p:ph type="title"/>
-          </p:nvPr>
-        </p:nvSpPr>
-        <p:spPr/>
-        <p:txBody>
-          <a:bodyPr/>
-          <a:lstStyle/>
-          <a:p>
-            <a:r>
+          <p:cNvPr id="2" name="Rectangle 1"/>
+          <p:cNvSpPr/>
+          <p:nvPr/>
+        </p:nvSpPr>
+        <p:spPr>
+          <a:xfrm>
+            <a:off x="0" y="0"/>
+            <a:ext cx="12191695" cy="6858000"/>
+          </a:xfrm>
+          <a:prstGeom prst="rect">
+            <a:avLst/>
+          </a:prstGeom>
+          <a:solidFill>
+            <a:srgbClr val="0F172A"/>
+          </a:solidFill>
+          <a:ln>
+            <a:noFill/>
+          </a:ln>
+          <a:effectLst/>
+        </p:spPr>
+        <p:style>
+          <a:lnRef idx="1">
+            <a:schemeClr val="accent1"/>
+          </a:lnRef>
+          <a:fillRef idx="3">
+            <a:schemeClr val="accent1"/>
+          </a:fillRef>
+          <a:effectRef idx="2">
+            <a:schemeClr val="accent1"/>
+          </a:effectRef>
+          <a:fontRef idx="minor">
+            <a:schemeClr val="lt1"/>
+          </a:fontRef>
+        </p:style>
+        <p:txBody>
+          <a:bodyPr rtlCol="0" anchor="ctr"/>
+          <a:lstStyle/>
+          <a:p>
+            <a:pPr algn="ctr"/>
+          </a:p>
+        </p:txBody>
+      </p:sp>
+      <p:sp>
+        <p:nvSpPr>
+          <p:cNvPr id="3" name="Rectangle 2"/>
+          <p:cNvSpPr/>
+          <p:nvPr/>
+        </p:nvSpPr>
+        <p:spPr>
+          <a:xfrm>
+            <a:off x="0" y="0"/>
+            <a:ext cx="137160" cy="6858000"/>
+          </a:xfrm>
+          <a:prstGeom prst="rect">
+            <a:avLst/>
+          </a:prstGeom>
+          <a:solidFill>
+            <a:srgbClr val="10B981"/>
+          </a:solidFill>
+          <a:ln>
+            <a:noFill/>
+          </a:ln>
+          <a:effectLst/>
+        </p:spPr>
+        <p:style>
+          <a:lnRef idx="1">
+            <a:schemeClr val="accent1"/>
+          </a:lnRef>
+          <a:fillRef idx="3">
+            <a:schemeClr val="accent1"/>
+          </a:fillRef>
+          <a:effectRef idx="2">
+            <a:schemeClr val="accent1"/>
+          </a:effectRef>
+          <a:fontRef idx="minor">
+            <a:schemeClr val="lt1"/>
+          </a:fontRef>
+        </p:style>
+        <p:txBody>
+          <a:bodyPr rtlCol="0" anchor="ctr"/>
+          <a:lstStyle/>
+          <a:p>
+            <a:pPr algn="ctr"/>
+          </a:p>
+        </p:txBody>
+      </p:sp>
+      <p:sp>
+        <p:nvSpPr>
+          <p:cNvPr id="4" name="TextBox 3"/>
+          <p:cNvSpPr txBox="1"/>
+          <p:nvPr/>
+        </p:nvSpPr>
+        <p:spPr>
+          <a:xfrm>
+            <a:off x="548640" y="320040"/>
+            <a:ext cx="10972800" cy="731520"/>
+          </a:xfrm>
+          <a:prstGeom prst="rect">
+            <a:avLst/>
+          </a:prstGeom>
+          <a:noFill/>
+        </p:spPr>
+        <p:txBody>
+          <a:bodyPr wrap="square">
+            <a:spAutoFit/>
+          </a:bodyPr>
+          <a:lstStyle/>
+          <a:p>
+            <a:pPr algn="l">
+              <a:lnSpc>
+                <a:spcPct val="115000"/>
+              </a:lnSpc>
+            </a:pPr>
+            <a:r>
+              <a:rPr sz="3000" b="1">
+                <a:solidFill>
+                  <a:srgbClr val="FFFFFF"/>
+                </a:solidFill>
+                <a:latin typeface="Calibri"/>
+              </a:rPr>
               <a:t>Key Business Insights</a:t>
             </a:r>
           </a:p>
@@ -4127,46 +7881,247 @@
       </p:sp>
       <p:sp>
         <p:nvSpPr>
-          <p:cNvPr id="3" name="Content Placeholder 2"/>
-          <p:cNvSpPr>
-            <a:spLocks noGrp="1"/>
-          </p:cNvSpPr>
-          <p:nvPr>
-            <p:ph idx="1"/>
-          </p:nvPr>
-        </p:nvSpPr>
-        <p:spPr/>
-        <p:txBody>
-          <a:bodyPr/>
-          <a:lstStyle/>
-          <a:p>
-            <a:pPr/>
-            <a:r>
-              <a:t>City Hotel cancels 41.8% of bookings vs 28.1% for Resort Hotel</a:t>
-            </a:r>
-          </a:p>
-          <a:p>
-            <a:pPr/>
-            <a:r>
-              <a:t>OTAs control ~68% of all bookings — high commission exposure</a:t>
-            </a:r>
-          </a:p>
-          <a:p>
-            <a:pPr/>
-            <a:r>
-              <a:t>Portugal dominates demand (47,784 bookings) — concentration risk</a:t>
-            </a:r>
-          </a:p>
-          <a:p>
-            <a:pPr/>
-            <a:r>
-              <a:t>Average lead time: 104.6 days — enables proactive revenue management</a:t>
-            </a:r>
-          </a:p>
-          <a:p>
-            <a:pPr/>
-            <a:r>
-              <a:t>37.3% overall cancellation rate justifies a predictive model</a:t>
+          <p:cNvPr id="5" name="TextBox 4"/>
+          <p:cNvSpPr txBox="1"/>
+          <p:nvPr/>
+        </p:nvSpPr>
+        <p:spPr>
+          <a:xfrm>
+            <a:off x="640080" y="1463040"/>
+            <a:ext cx="5394960" cy="4754880"/>
+          </a:xfrm>
+          <a:prstGeom prst="rect">
+            <a:avLst/>
+          </a:prstGeom>
+          <a:noFill/>
+        </p:spPr>
+        <p:txBody>
+          <a:bodyPr wrap="square">
+            <a:spAutoFit/>
+          </a:bodyPr>
+          <a:lstStyle/>
+          <a:p>
+            <a:pPr>
+              <a:lnSpc>
+                <a:spcPct val="130000"/>
+              </a:lnSpc>
+              <a:spcAft>
+                <a:spcPts val="1000"/>
+              </a:spcAft>
+            </a:pPr>
+            <a:r>
+              <a:rPr sz="1600">
+                <a:solidFill>
+                  <a:srgbClr val="CBD5E1"/>
+                </a:solidFill>
+                <a:latin typeface="Calibri"/>
+              </a:rPr>
+              <a:t>●  City Hotel cancels 41.8% of bookings vs 28.1% for Resort Hotel — nearly 50% higher risk.</a:t>
+            </a:r>
+          </a:p>
+          <a:p>
+            <a:pPr>
+              <a:lnSpc>
+                <a:spcPct val="130000"/>
+              </a:lnSpc>
+              <a:spcAft>
+                <a:spcPts val="1000"/>
+              </a:spcAft>
+            </a:pPr>
+            <a:r>
+              <a:rPr sz="1600">
+                <a:solidFill>
+                  <a:srgbClr val="CBD5E1"/>
+                </a:solidFill>
+                <a:latin typeface="Calibri"/>
+              </a:rPr>
+              <a:t>●  Non-refundable deposits show a paradoxically high cancellation rate — a red flag worth investigating operationally.</a:t>
+            </a:r>
+          </a:p>
+          <a:p>
+            <a:pPr>
+              <a:lnSpc>
+                <a:spcPct val="130000"/>
+              </a:lnSpc>
+              <a:spcAft>
+                <a:spcPts val="1000"/>
+              </a:spcAft>
+            </a:pPr>
+            <a:r>
+              <a:rPr sz="1600">
+                <a:solidFill>
+                  <a:srgbClr val="CBD5E1"/>
+                </a:solidFill>
+                <a:latin typeface="Calibri"/>
+              </a:rPr>
+              <a:t>●  Longer lead time correlates strongly with higher cancellation probability.</a:t>
+            </a:r>
+          </a:p>
+          <a:p>
+            <a:pPr>
+              <a:lnSpc>
+                <a:spcPct val="130000"/>
+              </a:lnSpc>
+              <a:spcAft>
+                <a:spcPts val="1000"/>
+              </a:spcAft>
+            </a:pPr>
+            <a:r>
+              <a:rPr sz="1600">
+                <a:solidFill>
+                  <a:srgbClr val="CBD5E1"/>
+                </a:solidFill>
+                <a:latin typeface="Calibri"/>
+              </a:rPr>
+              <a:t>●  Recommendation: apply stricter overbooking buffers for City Hotel and long-lead-time bookings.</a:t>
+            </a:r>
+          </a:p>
+        </p:txBody>
+      </p:sp>
+      <p:sp>
+        <p:nvSpPr>
+          <p:cNvPr id="6" name="Rounded Rectangle 5"/>
+          <p:cNvSpPr/>
+          <p:nvPr/>
+        </p:nvSpPr>
+        <p:spPr>
+          <a:xfrm>
+            <a:off x="6309360" y="1463040"/>
+            <a:ext cx="5212080" cy="4983480"/>
+          </a:xfrm>
+          <a:prstGeom prst="roundRect">
+            <a:avLst/>
+          </a:prstGeom>
+          <a:solidFill>
+            <a:srgbClr val="1E293B"/>
+          </a:solidFill>
+          <a:ln w="12700">
+            <a:solidFill>
+              <a:srgbClr val="334155"/>
+            </a:solidFill>
+          </a:ln>
+          <a:effectLst/>
+        </p:spPr>
+        <p:style>
+          <a:lnRef idx="1">
+            <a:schemeClr val="accent1"/>
+          </a:lnRef>
+          <a:fillRef idx="3">
+            <a:schemeClr val="accent1"/>
+          </a:fillRef>
+          <a:effectRef idx="2">
+            <a:schemeClr val="accent1"/>
+          </a:effectRef>
+          <a:fontRef idx="minor">
+            <a:schemeClr val="lt1"/>
+          </a:fontRef>
+        </p:style>
+        <p:txBody>
+          <a:bodyPr rtlCol="0" anchor="ctr"/>
+          <a:lstStyle/>
+          <a:p>
+            <a:pPr algn="ctr"/>
+          </a:p>
+        </p:txBody>
+      </p:sp>
+      <p:pic>
+        <p:nvPicPr>
+          <p:cNvPr id="7" name="Picture 6" descr="cancel_by_deposit.png"/>
+          <p:cNvPicPr>
+            <a:picLocks noChangeAspect="1"/>
+          </p:cNvPicPr>
+          <p:nvPr/>
+        </p:nvPicPr>
+        <p:blipFill>
+          <a:blip r:embed="rId2"/>
+          <a:stretch>
+            <a:fillRect/>
+          </a:stretch>
+        </p:blipFill>
+        <p:spPr>
+          <a:xfrm>
+            <a:off x="6400800" y="1554480"/>
+            <a:ext cx="6272784" cy="4480560"/>
+          </a:xfrm>
+          <a:prstGeom prst="rect">
+            <a:avLst/>
+          </a:prstGeom>
+        </p:spPr>
+      </p:pic>
+      <p:sp>
+        <p:nvSpPr>
+          <p:cNvPr id="8" name="TextBox 7"/>
+          <p:cNvSpPr txBox="1"/>
+          <p:nvPr/>
+        </p:nvSpPr>
+        <p:spPr>
+          <a:xfrm>
+            <a:off x="6309360" y="6080760"/>
+            <a:ext cx="5212080" cy="365760"/>
+          </a:xfrm>
+          <a:prstGeom prst="rect">
+            <a:avLst/>
+          </a:prstGeom>
+          <a:noFill/>
+        </p:spPr>
+        <p:txBody>
+          <a:bodyPr wrap="square">
+            <a:spAutoFit/>
+          </a:bodyPr>
+          <a:lstStyle/>
+          <a:p>
+            <a:pPr algn="ctr">
+              <a:lnSpc>
+                <a:spcPct val="115000"/>
+              </a:lnSpc>
+            </a:pPr>
+            <a:r>
+              <a:rPr sz="1100" b="0">
+                <a:solidFill>
+                  <a:srgbClr val="CBD5E1"/>
+                </a:solidFill>
+                <a:latin typeface="Calibri"/>
+              </a:rPr>
+              <a:t>Cancellation rate by deposit type</a:t>
+            </a:r>
+          </a:p>
+        </p:txBody>
+      </p:sp>
+      <p:sp>
+        <p:nvSpPr>
+          <p:cNvPr id="9" name="TextBox 8"/>
+          <p:cNvSpPr txBox="1"/>
+          <p:nvPr/>
+        </p:nvSpPr>
+        <p:spPr>
+          <a:xfrm>
+            <a:off x="11521440" y="6446520"/>
+            <a:ext cx="548640" cy="320040"/>
+          </a:xfrm>
+          <a:prstGeom prst="rect">
+            <a:avLst/>
+          </a:prstGeom>
+          <a:noFill/>
+        </p:spPr>
+        <p:txBody>
+          <a:bodyPr wrap="square">
+            <a:spAutoFit/>
+          </a:bodyPr>
+          <a:lstStyle/>
+          <a:p>
+            <a:pPr algn="r">
+              <a:lnSpc>
+                <a:spcPct val="115000"/>
+              </a:lnSpc>
+            </a:pPr>
+            <a:r>
+              <a:rPr sz="1100" b="0">
+                <a:solidFill>
+                  <a:srgbClr val="CBD5E1"/>
+                </a:solidFill>
+                <a:latin typeface="Calibri"/>
+              </a:rPr>
+              <a:t>8</a:t>
             </a:r>
           </a:p>
         </p:txBody>
@@ -4191,20 +8146,126 @@
       <p:grpSpPr/>
       <p:sp>
         <p:nvSpPr>
-          <p:cNvPr id="2" name="Title 1"/>
-          <p:cNvSpPr>
-            <a:spLocks noGrp="1"/>
-          </p:cNvSpPr>
-          <p:nvPr>
-            <p:ph type="title"/>
-          </p:nvPr>
-        </p:nvSpPr>
-        <p:spPr/>
-        <p:txBody>
-          <a:bodyPr/>
-          <a:lstStyle/>
-          <a:p>
-            <a:r>
+          <p:cNvPr id="2" name="Rectangle 1"/>
+          <p:cNvSpPr/>
+          <p:nvPr/>
+        </p:nvSpPr>
+        <p:spPr>
+          <a:xfrm>
+            <a:off x="0" y="0"/>
+            <a:ext cx="12191695" cy="6858000"/>
+          </a:xfrm>
+          <a:prstGeom prst="rect">
+            <a:avLst/>
+          </a:prstGeom>
+          <a:solidFill>
+            <a:srgbClr val="0F172A"/>
+          </a:solidFill>
+          <a:ln>
+            <a:noFill/>
+          </a:ln>
+          <a:effectLst/>
+        </p:spPr>
+        <p:style>
+          <a:lnRef idx="1">
+            <a:schemeClr val="accent1"/>
+          </a:lnRef>
+          <a:fillRef idx="3">
+            <a:schemeClr val="accent1"/>
+          </a:fillRef>
+          <a:effectRef idx="2">
+            <a:schemeClr val="accent1"/>
+          </a:effectRef>
+          <a:fontRef idx="minor">
+            <a:schemeClr val="lt1"/>
+          </a:fontRef>
+        </p:style>
+        <p:txBody>
+          <a:bodyPr rtlCol="0" anchor="ctr"/>
+          <a:lstStyle/>
+          <a:p>
+            <a:pPr algn="ctr"/>
+          </a:p>
+        </p:txBody>
+      </p:sp>
+      <p:sp>
+        <p:nvSpPr>
+          <p:cNvPr id="3" name="Rectangle 2"/>
+          <p:cNvSpPr/>
+          <p:nvPr/>
+        </p:nvSpPr>
+        <p:spPr>
+          <a:xfrm>
+            <a:off x="0" y="0"/>
+            <a:ext cx="137160" cy="6858000"/>
+          </a:xfrm>
+          <a:prstGeom prst="rect">
+            <a:avLst/>
+          </a:prstGeom>
+          <a:solidFill>
+            <a:srgbClr val="F97316"/>
+          </a:solidFill>
+          <a:ln>
+            <a:noFill/>
+          </a:ln>
+          <a:effectLst/>
+        </p:spPr>
+        <p:style>
+          <a:lnRef idx="1">
+            <a:schemeClr val="accent1"/>
+          </a:lnRef>
+          <a:fillRef idx="3">
+            <a:schemeClr val="accent1"/>
+          </a:fillRef>
+          <a:effectRef idx="2">
+            <a:schemeClr val="accent1"/>
+          </a:effectRef>
+          <a:fontRef idx="minor">
+            <a:schemeClr val="lt1"/>
+          </a:fontRef>
+        </p:style>
+        <p:txBody>
+          <a:bodyPr rtlCol="0" anchor="ctr"/>
+          <a:lstStyle/>
+          <a:p>
+            <a:pPr algn="ctr"/>
+          </a:p>
+        </p:txBody>
+      </p:sp>
+      <p:sp>
+        <p:nvSpPr>
+          <p:cNvPr id="4" name="TextBox 3"/>
+          <p:cNvSpPr txBox="1"/>
+          <p:nvPr/>
+        </p:nvSpPr>
+        <p:spPr>
+          <a:xfrm>
+            <a:off x="548640" y="320040"/>
+            <a:ext cx="10972800" cy="731520"/>
+          </a:xfrm>
+          <a:prstGeom prst="rect">
+            <a:avLst/>
+          </a:prstGeom>
+          <a:noFill/>
+        </p:spPr>
+        <p:txBody>
+          <a:bodyPr wrap="square">
+            <a:spAutoFit/>
+          </a:bodyPr>
+          <a:lstStyle/>
+          <a:p>
+            <a:pPr algn="l">
+              <a:lnSpc>
+                <a:spcPct val="115000"/>
+              </a:lnSpc>
+            </a:pPr>
+            <a:r>
+              <a:rPr sz="3000" b="1">
+                <a:solidFill>
+                  <a:srgbClr val="FFFFFF"/>
+                </a:solidFill>
+                <a:latin typeface="Calibri"/>
+              </a:rPr>
               <a:t>CrewAI Flow — The Handoff</a:t>
             </a:r>
           </a:p>
@@ -4212,46 +8273,247 @@
       </p:sp>
       <p:sp>
         <p:nvSpPr>
-          <p:cNvPr id="3" name="Content Placeholder 2"/>
-          <p:cNvSpPr>
-            <a:spLocks noGrp="1"/>
-          </p:cNvSpPr>
-          <p:nvPr>
-            <p:ph idx="1"/>
-          </p:nvPr>
-        </p:nvSpPr>
-        <p:spPr/>
-        <p:txBody>
-          <a:bodyPr/>
-          <a:lstStyle/>
-          <a:p>
-            <a:pPr/>
-            <a:r>
-              <a:t>Automates Crew 1 -&gt; Crew 2 handoff</a:t>
-            </a:r>
-          </a:p>
-          <a:p>
-            <a:pPr/>
-            <a:r>
-              <a:t>Validation gate: confirms dataset_contract.json matches clean_data.csv</a:t>
-            </a:r>
-          </a:p>
-          <a:p>
-            <a:pPr/>
-            <a:r>
-              <a:t>Confirms all required columns exist before modeling starts</a:t>
-            </a:r>
-          </a:p>
-          <a:p>
-            <a:pPr/>
-            <a:r>
-              <a:t>Fails gracefully with FlowValidationError if any check fails</a:t>
-            </a:r>
-          </a:p>
-          <a:p>
-            <a:pPr/>
-            <a:r>
-              <a:t>Full run log saved to outputs/flow_run_log.json</a:t>
+          <p:cNvPr id="5" name="TextBox 4"/>
+          <p:cNvSpPr txBox="1"/>
+          <p:nvPr/>
+        </p:nvSpPr>
+        <p:spPr>
+          <a:xfrm>
+            <a:off x="640080" y="1463040"/>
+            <a:ext cx="5486400" cy="4572000"/>
+          </a:xfrm>
+          <a:prstGeom prst="rect">
+            <a:avLst/>
+          </a:prstGeom>
+          <a:noFill/>
+        </p:spPr>
+        <p:txBody>
+          <a:bodyPr wrap="square">
+            <a:spAutoFit/>
+          </a:bodyPr>
+          <a:lstStyle/>
+          <a:p>
+            <a:pPr>
+              <a:lnSpc>
+                <a:spcPct val="130000"/>
+              </a:lnSpc>
+              <a:spcAft>
+                <a:spcPts val="1000"/>
+              </a:spcAft>
+            </a:pPr>
+            <a:r>
+              <a:rPr sz="1600">
+                <a:solidFill>
+                  <a:srgbClr val="CBD5E1"/>
+                </a:solidFill>
+                <a:latin typeface="Calibri"/>
+              </a:rPr>
+              <a:t>●  Automates Crew 1 → Crew 2 handoff — no manual file passing.</a:t>
+            </a:r>
+          </a:p>
+          <a:p>
+            <a:pPr>
+              <a:lnSpc>
+                <a:spcPct val="130000"/>
+              </a:lnSpc>
+              <a:spcAft>
+                <a:spcPts val="1000"/>
+              </a:spcAft>
+            </a:pPr>
+            <a:r>
+              <a:rPr sz="1600">
+                <a:solidFill>
+                  <a:srgbClr val="CBD5E1"/>
+                </a:solidFill>
+                <a:latin typeface="Calibri"/>
+              </a:rPr>
+              <a:t>●  Validation gate: confirms clean_data.csv matches dataset_contract.json before any modeling starts.</a:t>
+            </a:r>
+          </a:p>
+          <a:p>
+            <a:pPr>
+              <a:lnSpc>
+                <a:spcPct val="130000"/>
+              </a:lnSpc>
+              <a:spcAft>
+                <a:spcPts val="1000"/>
+              </a:spcAft>
+            </a:pPr>
+            <a:r>
+              <a:rPr sz="1600">
+                <a:solidFill>
+                  <a:srgbClr val="CBD5E1"/>
+                </a:solidFill>
+                <a:latin typeface="Calibri"/>
+              </a:rPr>
+              <a:t>●  Fails gracefully: if leakage columns are detected or the contract doesn't match, the Flow stops Crew 2 and reports why.</a:t>
+            </a:r>
+          </a:p>
+          <a:p>
+            <a:pPr>
+              <a:lnSpc>
+                <a:spcPct val="130000"/>
+              </a:lnSpc>
+              <a:spcAft>
+                <a:spcPts val="1000"/>
+              </a:spcAft>
+            </a:pPr>
+            <a:r>
+              <a:rPr sz="1600">
+                <a:solidFill>
+                  <a:srgbClr val="CBD5E1"/>
+                </a:solidFill>
+                <a:latin typeface="Calibri"/>
+              </a:rPr>
+              <a:t>●  This mirrors production ML pipelines, where a broken upstream contract must never silently corrupt downstream models.</a:t>
+            </a:r>
+          </a:p>
+        </p:txBody>
+      </p:sp>
+      <p:sp>
+        <p:nvSpPr>
+          <p:cNvPr id="6" name="Rounded Rectangle 5"/>
+          <p:cNvSpPr/>
+          <p:nvPr/>
+        </p:nvSpPr>
+        <p:spPr>
+          <a:xfrm>
+            <a:off x="6400800" y="1463040"/>
+            <a:ext cx="5120640" cy="4983480"/>
+          </a:xfrm>
+          <a:prstGeom prst="roundRect">
+            <a:avLst/>
+          </a:prstGeom>
+          <a:solidFill>
+            <a:srgbClr val="1E293B"/>
+          </a:solidFill>
+          <a:ln w="12700">
+            <a:solidFill>
+              <a:srgbClr val="334155"/>
+            </a:solidFill>
+          </a:ln>
+          <a:effectLst/>
+        </p:spPr>
+        <p:style>
+          <a:lnRef idx="1">
+            <a:schemeClr val="accent1"/>
+          </a:lnRef>
+          <a:fillRef idx="3">
+            <a:schemeClr val="accent1"/>
+          </a:fillRef>
+          <a:effectRef idx="2">
+            <a:schemeClr val="accent1"/>
+          </a:effectRef>
+          <a:fontRef idx="minor">
+            <a:schemeClr val="lt1"/>
+          </a:fontRef>
+        </p:style>
+        <p:txBody>
+          <a:bodyPr rtlCol="0" anchor="ctr"/>
+          <a:lstStyle/>
+          <a:p>
+            <a:pPr algn="ctr"/>
+          </a:p>
+        </p:txBody>
+      </p:sp>
+      <p:pic>
+        <p:nvPicPr>
+          <p:cNvPr id="7" name="Picture 6" descr="lead_time_dist.png"/>
+          <p:cNvPicPr>
+            <a:picLocks noChangeAspect="1"/>
+          </p:cNvPicPr>
+          <p:nvPr/>
+        </p:nvPicPr>
+        <p:blipFill>
+          <a:blip r:embed="rId2"/>
+          <a:stretch>
+            <a:fillRect/>
+          </a:stretch>
+        </p:blipFill>
+        <p:spPr>
+          <a:xfrm>
+            <a:off x="6492240" y="1554480"/>
+            <a:ext cx="6272784" cy="4480560"/>
+          </a:xfrm>
+          <a:prstGeom prst="rect">
+            <a:avLst/>
+          </a:prstGeom>
+        </p:spPr>
+      </p:pic>
+      <p:sp>
+        <p:nvSpPr>
+          <p:cNvPr id="8" name="TextBox 7"/>
+          <p:cNvSpPr txBox="1"/>
+          <p:nvPr/>
+        </p:nvSpPr>
+        <p:spPr>
+          <a:xfrm>
+            <a:off x="6400800" y="6080760"/>
+            <a:ext cx="5120640" cy="365760"/>
+          </a:xfrm>
+          <a:prstGeom prst="rect">
+            <a:avLst/>
+          </a:prstGeom>
+          <a:noFill/>
+        </p:spPr>
+        <p:txBody>
+          <a:bodyPr wrap="square">
+            <a:spAutoFit/>
+          </a:bodyPr>
+          <a:lstStyle/>
+          <a:p>
+            <a:pPr algn="ctr">
+              <a:lnSpc>
+                <a:spcPct val="115000"/>
+              </a:lnSpc>
+            </a:pPr>
+            <a:r>
+              <a:rPr sz="1100" b="0">
+                <a:solidFill>
+                  <a:srgbClr val="CBD5E1"/>
+                </a:solidFill>
+                <a:latin typeface="Calibri"/>
+              </a:rPr>
+              <a:t>Lead time distribution: canceled vs completed bookings</a:t>
+            </a:r>
+          </a:p>
+        </p:txBody>
+      </p:sp>
+      <p:sp>
+        <p:nvSpPr>
+          <p:cNvPr id="9" name="TextBox 8"/>
+          <p:cNvSpPr txBox="1"/>
+          <p:nvPr/>
+        </p:nvSpPr>
+        <p:spPr>
+          <a:xfrm>
+            <a:off x="11521440" y="6446520"/>
+            <a:ext cx="548640" cy="320040"/>
+          </a:xfrm>
+          <a:prstGeom prst="rect">
+            <a:avLst/>
+          </a:prstGeom>
+          <a:noFill/>
+        </p:spPr>
+        <p:txBody>
+          <a:bodyPr wrap="square">
+            <a:spAutoFit/>
+          </a:bodyPr>
+          <a:lstStyle/>
+          <a:p>
+            <a:pPr algn="r">
+              <a:lnSpc>
+                <a:spcPct val="115000"/>
+              </a:lnSpc>
+            </a:pPr>
+            <a:r>
+              <a:rPr sz="1100" b="0">
+                <a:solidFill>
+                  <a:srgbClr val="CBD5E1"/>
+                </a:solidFill>
+                <a:latin typeface="Calibri"/>
+              </a:rPr>
+              <a:t>9</a:t>
             </a:r>
           </a:p>
         </p:txBody>
